--- a/diagrams/planning.pptx
+++ b/diagrams/planning.pptx
@@ -5,8 +5,9 @@
     <p:sldMasterId id="2147483648" r:id="rId1"/>
   </p:sldMasterIdLst>
   <p:sldIdLst>
-    <p:sldId id="257" r:id="rId2"/>
-    <p:sldId id="256" r:id="rId3"/>
+    <p:sldId id="258" r:id="rId2"/>
+    <p:sldId id="257" r:id="rId3"/>
+    <p:sldId id="256" r:id="rId4"/>
   </p:sldIdLst>
   <p:sldSz cx="12192000" cy="6858000"/>
   <p:notesSz cx="6858000" cy="9144000"/>
@@ -105,6 +106,11 @@
       </a:defRPr>
     </a:lvl9pPr>
   </p:defaultTextStyle>
+  <p:extLst>
+    <p:ext uri="{EFAFB233-063F-42B5-8137-9DF3F51BA10A}">
+      <p15:sldGuideLst xmlns:p15="http://schemas.microsoft.com/office/powerpoint/2012/main"/>
+    </p:ext>
+  </p:extLst>
 </p:presentation>
 </file>
 
@@ -255,7 +261,7 @@
           <a:p>
             <a:fld id="{D4C0DCA0-CB38-4624-ADE0-A982348E0789}" type="datetimeFigureOut">
               <a:rPr lang="de-DE" smtClean="0"/>
-              <a:t>20.05.2026</a:t>
+              <a:t>18.06.2026</a:t>
             </a:fld>
             <a:endParaRPr lang="de-DE"/>
           </a:p>
@@ -453,7 +459,7 @@
           <a:p>
             <a:fld id="{D4C0DCA0-CB38-4624-ADE0-A982348E0789}" type="datetimeFigureOut">
               <a:rPr lang="de-DE" smtClean="0"/>
-              <a:t>20.05.2026</a:t>
+              <a:t>18.06.2026</a:t>
             </a:fld>
             <a:endParaRPr lang="de-DE"/>
           </a:p>
@@ -661,7 +667,7 @@
           <a:p>
             <a:fld id="{D4C0DCA0-CB38-4624-ADE0-A982348E0789}" type="datetimeFigureOut">
               <a:rPr lang="de-DE" smtClean="0"/>
-              <a:t>20.05.2026</a:t>
+              <a:t>18.06.2026</a:t>
             </a:fld>
             <a:endParaRPr lang="de-DE"/>
           </a:p>
@@ -859,7 +865,7 @@
           <a:p>
             <a:fld id="{D4C0DCA0-CB38-4624-ADE0-A982348E0789}" type="datetimeFigureOut">
               <a:rPr lang="de-DE" smtClean="0"/>
-              <a:t>20.05.2026</a:t>
+              <a:t>18.06.2026</a:t>
             </a:fld>
             <a:endParaRPr lang="de-DE"/>
           </a:p>
@@ -1134,7 +1140,7 @@
           <a:p>
             <a:fld id="{D4C0DCA0-CB38-4624-ADE0-A982348E0789}" type="datetimeFigureOut">
               <a:rPr lang="de-DE" smtClean="0"/>
-              <a:t>20.05.2026</a:t>
+              <a:t>18.06.2026</a:t>
             </a:fld>
             <a:endParaRPr lang="de-DE"/>
           </a:p>
@@ -1399,7 +1405,7 @@
           <a:p>
             <a:fld id="{D4C0DCA0-CB38-4624-ADE0-A982348E0789}" type="datetimeFigureOut">
               <a:rPr lang="de-DE" smtClean="0"/>
-              <a:t>20.05.2026</a:t>
+              <a:t>18.06.2026</a:t>
             </a:fld>
             <a:endParaRPr lang="de-DE"/>
           </a:p>
@@ -1811,7 +1817,7 @@
           <a:p>
             <a:fld id="{D4C0DCA0-CB38-4624-ADE0-A982348E0789}" type="datetimeFigureOut">
               <a:rPr lang="de-DE" smtClean="0"/>
-              <a:t>20.05.2026</a:t>
+              <a:t>18.06.2026</a:t>
             </a:fld>
             <a:endParaRPr lang="de-DE"/>
           </a:p>
@@ -1952,7 +1958,7 @@
           <a:p>
             <a:fld id="{D4C0DCA0-CB38-4624-ADE0-A982348E0789}" type="datetimeFigureOut">
               <a:rPr lang="de-DE" smtClean="0"/>
-              <a:t>20.05.2026</a:t>
+              <a:t>18.06.2026</a:t>
             </a:fld>
             <a:endParaRPr lang="de-DE"/>
           </a:p>
@@ -2065,7 +2071,7 @@
           <a:p>
             <a:fld id="{D4C0DCA0-CB38-4624-ADE0-A982348E0789}" type="datetimeFigureOut">
               <a:rPr lang="de-DE" smtClean="0"/>
-              <a:t>20.05.2026</a:t>
+              <a:t>18.06.2026</a:t>
             </a:fld>
             <a:endParaRPr lang="de-DE"/>
           </a:p>
@@ -2376,7 +2382,7 @@
           <a:p>
             <a:fld id="{D4C0DCA0-CB38-4624-ADE0-A982348E0789}" type="datetimeFigureOut">
               <a:rPr lang="de-DE" smtClean="0"/>
-              <a:t>20.05.2026</a:t>
+              <a:t>18.06.2026</a:t>
             </a:fld>
             <a:endParaRPr lang="de-DE"/>
           </a:p>
@@ -2664,7 +2670,7 @@
           <a:p>
             <a:fld id="{D4C0DCA0-CB38-4624-ADE0-A982348E0789}" type="datetimeFigureOut">
               <a:rPr lang="de-DE" smtClean="0"/>
-              <a:t>20.05.2026</a:t>
+              <a:t>18.06.2026</a:t>
             </a:fld>
             <a:endParaRPr lang="de-DE"/>
           </a:p>
@@ -2905,7 +2911,7 @@
           <a:p>
             <a:fld id="{D4C0DCA0-CB38-4624-ADE0-A982348E0789}" type="datetimeFigureOut">
               <a:rPr lang="de-DE" smtClean="0"/>
-              <a:t>20.05.2026</a:t>
+              <a:t>18.06.2026</a:t>
             </a:fld>
             <a:endParaRPr lang="de-DE"/>
           </a:p>
@@ -3306,6 +3312,4263 @@
 </file>
 
 <file path=ppt/slides/slide1.xml><?xml version="1.0" encoding="utf-8"?>
+<p:sld xmlns:a="http://schemas.openxmlformats.org/drawingml/2006/main" xmlns:r="http://schemas.openxmlformats.org/officeDocument/2006/relationships" xmlns:p="http://schemas.openxmlformats.org/presentationml/2006/main">
+  <p:cSld>
+    <p:spTree>
+      <p:nvGrpSpPr>
+        <p:cNvPr id="1" name="">
+          <a:extLst>
+            <a:ext uri="{FF2B5EF4-FFF2-40B4-BE49-F238E27FC236}">
+              <a16:creationId xmlns:a16="http://schemas.microsoft.com/office/drawing/2014/main" id="{7C97C361-960F-8883-3D94-F4AA7D05B398}"/>
+            </a:ext>
+          </a:extLst>
+        </p:cNvPr>
+        <p:cNvGrpSpPr/>
+        <p:nvPr/>
+      </p:nvGrpSpPr>
+      <p:grpSpPr>
+        <a:xfrm>
+          <a:off x="0" y="0"/>
+          <a:ext cx="0" cy="0"/>
+          <a:chOff x="0" y="0"/>
+          <a:chExt cx="0" cy="0"/>
+        </a:xfrm>
+      </p:grpSpPr>
+      <p:grpSp>
+        <p:nvGrpSpPr>
+          <p:cNvPr id="110" name="Gruppieren 109">
+            <a:extLst>
+              <a:ext uri="{FF2B5EF4-FFF2-40B4-BE49-F238E27FC236}">
+                <a16:creationId xmlns:a16="http://schemas.microsoft.com/office/drawing/2014/main" id="{019C640A-B539-8E84-B5B4-AA2BEF317AC3}"/>
+              </a:ext>
+            </a:extLst>
+          </p:cNvPr>
+          <p:cNvGrpSpPr/>
+          <p:nvPr/>
+        </p:nvGrpSpPr>
+        <p:grpSpPr>
+          <a:xfrm>
+            <a:off x="9624736" y="194733"/>
+            <a:ext cx="2048933" cy="6468534"/>
+            <a:chOff x="254000" y="248789"/>
+            <a:chExt cx="2201757" cy="6307043"/>
+          </a:xfrm>
+          <a:solidFill>
+            <a:schemeClr val="accent2">
+              <a:lumMod val="50000"/>
+            </a:schemeClr>
+          </a:solidFill>
+        </p:grpSpPr>
+        <p:sp>
+          <p:nvSpPr>
+            <p:cNvPr id="111" name="Rechteck 110">
+              <a:extLst>
+                <a:ext uri="{FF2B5EF4-FFF2-40B4-BE49-F238E27FC236}">
+                  <a16:creationId xmlns:a16="http://schemas.microsoft.com/office/drawing/2014/main" id="{A4F645C0-6740-E845-49F5-C2DCB6D96028}"/>
+                </a:ext>
+              </a:extLst>
+            </p:cNvPr>
+            <p:cNvSpPr/>
+            <p:nvPr/>
+          </p:nvSpPr>
+          <p:spPr>
+            <a:xfrm>
+              <a:off x="254000" y="248789"/>
+              <a:ext cx="2201757" cy="6307043"/>
+            </a:xfrm>
+            <a:prstGeom prst="rect">
+              <a:avLst/>
+            </a:prstGeom>
+            <a:grpFill/>
+          </p:spPr>
+          <p:style>
+            <a:lnRef idx="2">
+              <a:schemeClr val="accent1">
+                <a:shade val="15000"/>
+              </a:schemeClr>
+            </a:lnRef>
+            <a:fillRef idx="1">
+              <a:schemeClr val="accent1"/>
+            </a:fillRef>
+            <a:effectRef idx="0">
+              <a:schemeClr val="accent1"/>
+            </a:effectRef>
+            <a:fontRef idx="minor">
+              <a:schemeClr val="lt1"/>
+            </a:fontRef>
+          </p:style>
+          <p:txBody>
+            <a:bodyPr rtlCol="0" anchor="ctr"/>
+            <a:lstStyle/>
+            <a:p>
+              <a:pPr algn="ctr"/>
+              <a:endParaRPr lang="de-DE" dirty="0"/>
+            </a:p>
+          </p:txBody>
+        </p:sp>
+        <p:sp>
+          <p:nvSpPr>
+            <p:cNvPr id="112" name="Rechteck 111">
+              <a:extLst>
+                <a:ext uri="{FF2B5EF4-FFF2-40B4-BE49-F238E27FC236}">
+                  <a16:creationId xmlns:a16="http://schemas.microsoft.com/office/drawing/2014/main" id="{E4AC1625-460C-E253-56A6-109532DDC151}"/>
+                </a:ext>
+              </a:extLst>
+            </p:cNvPr>
+            <p:cNvSpPr/>
+            <p:nvPr/>
+          </p:nvSpPr>
+          <p:spPr>
+            <a:xfrm>
+              <a:off x="262465" y="248789"/>
+              <a:ext cx="2193292" cy="377985"/>
+            </a:xfrm>
+            <a:prstGeom prst="rect">
+              <a:avLst/>
+            </a:prstGeom>
+            <a:grpFill/>
+          </p:spPr>
+          <p:style>
+            <a:lnRef idx="2">
+              <a:schemeClr val="accent1">
+                <a:shade val="15000"/>
+              </a:schemeClr>
+            </a:lnRef>
+            <a:fillRef idx="1">
+              <a:schemeClr val="accent1"/>
+            </a:fillRef>
+            <a:effectRef idx="0">
+              <a:schemeClr val="accent1"/>
+            </a:effectRef>
+            <a:fontRef idx="minor">
+              <a:schemeClr val="lt1"/>
+            </a:fontRef>
+          </p:style>
+          <p:txBody>
+            <a:bodyPr rtlCol="0" anchor="ctr"/>
+            <a:lstStyle/>
+            <a:p>
+              <a:pPr algn="ctr"/>
+              <a:r>
+                <a:rPr lang="de-DE" sz="1600" b="1" dirty="0"/>
+                <a:t>Open Tasks (Future)</a:t>
+              </a:r>
+            </a:p>
+          </p:txBody>
+        </p:sp>
+      </p:grpSp>
+      <p:grpSp>
+        <p:nvGrpSpPr>
+          <p:cNvPr id="101" name="Gruppieren 100">
+            <a:extLst>
+              <a:ext uri="{FF2B5EF4-FFF2-40B4-BE49-F238E27FC236}">
+                <a16:creationId xmlns:a16="http://schemas.microsoft.com/office/drawing/2014/main" id="{F8F56AB2-884D-6629-CF04-FF7E075AFAA1}"/>
+              </a:ext>
+            </a:extLst>
+          </p:cNvPr>
+          <p:cNvGrpSpPr/>
+          <p:nvPr/>
+        </p:nvGrpSpPr>
+        <p:grpSpPr>
+          <a:xfrm>
+            <a:off x="2771309" y="204376"/>
+            <a:ext cx="2048933" cy="6468534"/>
+            <a:chOff x="254000" y="248789"/>
+            <a:chExt cx="2201757" cy="6307043"/>
+          </a:xfrm>
+          <a:solidFill>
+            <a:schemeClr val="accent6">
+              <a:lumMod val="75000"/>
+            </a:schemeClr>
+          </a:solidFill>
+        </p:grpSpPr>
+        <p:sp>
+          <p:nvSpPr>
+            <p:cNvPr id="102" name="Rechteck 101">
+              <a:extLst>
+                <a:ext uri="{FF2B5EF4-FFF2-40B4-BE49-F238E27FC236}">
+                  <a16:creationId xmlns:a16="http://schemas.microsoft.com/office/drawing/2014/main" id="{AC8E40A4-8B3B-822D-B0D8-E6C828D2822A}"/>
+                </a:ext>
+              </a:extLst>
+            </p:cNvPr>
+            <p:cNvSpPr/>
+            <p:nvPr/>
+          </p:nvSpPr>
+          <p:spPr>
+            <a:xfrm>
+              <a:off x="254000" y="248789"/>
+              <a:ext cx="2201757" cy="6307043"/>
+            </a:xfrm>
+            <a:prstGeom prst="rect">
+              <a:avLst/>
+            </a:prstGeom>
+            <a:grpFill/>
+          </p:spPr>
+          <p:style>
+            <a:lnRef idx="2">
+              <a:schemeClr val="accent1">
+                <a:shade val="15000"/>
+              </a:schemeClr>
+            </a:lnRef>
+            <a:fillRef idx="1">
+              <a:schemeClr val="accent1"/>
+            </a:fillRef>
+            <a:effectRef idx="0">
+              <a:schemeClr val="accent1"/>
+            </a:effectRef>
+            <a:fontRef idx="minor">
+              <a:schemeClr val="lt1"/>
+            </a:fontRef>
+          </p:style>
+          <p:txBody>
+            <a:bodyPr rtlCol="0" anchor="ctr"/>
+            <a:lstStyle/>
+            <a:p>
+              <a:pPr algn="ctr"/>
+              <a:endParaRPr lang="de-DE" dirty="0"/>
+            </a:p>
+          </p:txBody>
+        </p:sp>
+        <p:sp>
+          <p:nvSpPr>
+            <p:cNvPr id="103" name="Rechteck 102">
+              <a:extLst>
+                <a:ext uri="{FF2B5EF4-FFF2-40B4-BE49-F238E27FC236}">
+                  <a16:creationId xmlns:a16="http://schemas.microsoft.com/office/drawing/2014/main" id="{04A50832-868E-8FA9-4703-ADE82B9570EB}"/>
+                </a:ext>
+              </a:extLst>
+            </p:cNvPr>
+            <p:cNvSpPr/>
+            <p:nvPr/>
+          </p:nvSpPr>
+          <p:spPr>
+            <a:xfrm>
+              <a:off x="262465" y="248789"/>
+              <a:ext cx="2193292" cy="375920"/>
+            </a:xfrm>
+            <a:prstGeom prst="rect">
+              <a:avLst/>
+            </a:prstGeom>
+            <a:grpFill/>
+          </p:spPr>
+          <p:style>
+            <a:lnRef idx="2">
+              <a:schemeClr val="accent1">
+                <a:shade val="15000"/>
+              </a:schemeClr>
+            </a:lnRef>
+            <a:fillRef idx="1">
+              <a:schemeClr val="accent1"/>
+            </a:fillRef>
+            <a:effectRef idx="0">
+              <a:schemeClr val="accent1"/>
+            </a:effectRef>
+            <a:fontRef idx="minor">
+              <a:schemeClr val="lt1"/>
+            </a:fontRef>
+          </p:style>
+          <p:txBody>
+            <a:bodyPr rtlCol="0" anchor="ctr"/>
+            <a:lstStyle/>
+            <a:p>
+              <a:pPr algn="ctr"/>
+              <a:r>
+                <a:rPr lang="de-DE" sz="1600" b="1" dirty="0"/>
+                <a:t>Data Collection</a:t>
+              </a:r>
+            </a:p>
+          </p:txBody>
+        </p:sp>
+      </p:grpSp>
+      <p:grpSp>
+        <p:nvGrpSpPr>
+          <p:cNvPr id="104" name="Gruppieren 103">
+            <a:extLst>
+              <a:ext uri="{FF2B5EF4-FFF2-40B4-BE49-F238E27FC236}">
+                <a16:creationId xmlns:a16="http://schemas.microsoft.com/office/drawing/2014/main" id="{A01F2554-08C8-78CB-8BD5-2E37DF4362D5}"/>
+              </a:ext>
+            </a:extLst>
+          </p:cNvPr>
+          <p:cNvGrpSpPr/>
+          <p:nvPr/>
+        </p:nvGrpSpPr>
+        <p:grpSpPr>
+          <a:xfrm>
+            <a:off x="5058664" y="204376"/>
+            <a:ext cx="2048933" cy="6468534"/>
+            <a:chOff x="254000" y="248789"/>
+            <a:chExt cx="2201757" cy="6307043"/>
+          </a:xfrm>
+          <a:solidFill>
+            <a:schemeClr val="accent6">
+              <a:lumMod val="50000"/>
+            </a:schemeClr>
+          </a:solidFill>
+        </p:grpSpPr>
+        <p:sp>
+          <p:nvSpPr>
+            <p:cNvPr id="105" name="Rechteck 104">
+              <a:extLst>
+                <a:ext uri="{FF2B5EF4-FFF2-40B4-BE49-F238E27FC236}">
+                  <a16:creationId xmlns:a16="http://schemas.microsoft.com/office/drawing/2014/main" id="{83B19F6A-292F-F5E5-72CD-71EB674361E8}"/>
+                </a:ext>
+              </a:extLst>
+            </p:cNvPr>
+            <p:cNvSpPr/>
+            <p:nvPr/>
+          </p:nvSpPr>
+          <p:spPr>
+            <a:xfrm>
+              <a:off x="254000" y="248789"/>
+              <a:ext cx="2201757" cy="6307043"/>
+            </a:xfrm>
+            <a:prstGeom prst="rect">
+              <a:avLst/>
+            </a:prstGeom>
+            <a:grpFill/>
+          </p:spPr>
+          <p:style>
+            <a:lnRef idx="2">
+              <a:schemeClr val="accent1">
+                <a:shade val="15000"/>
+              </a:schemeClr>
+            </a:lnRef>
+            <a:fillRef idx="1">
+              <a:schemeClr val="accent1"/>
+            </a:fillRef>
+            <a:effectRef idx="0">
+              <a:schemeClr val="accent1"/>
+            </a:effectRef>
+            <a:fontRef idx="minor">
+              <a:schemeClr val="lt1"/>
+            </a:fontRef>
+          </p:style>
+          <p:txBody>
+            <a:bodyPr rtlCol="0" anchor="ctr"/>
+            <a:lstStyle/>
+            <a:p>
+              <a:pPr algn="ctr"/>
+              <a:endParaRPr lang="de-DE" dirty="0"/>
+            </a:p>
+          </p:txBody>
+        </p:sp>
+        <p:sp>
+          <p:nvSpPr>
+            <p:cNvPr id="106" name="Rechteck 105">
+              <a:extLst>
+                <a:ext uri="{FF2B5EF4-FFF2-40B4-BE49-F238E27FC236}">
+                  <a16:creationId xmlns:a16="http://schemas.microsoft.com/office/drawing/2014/main" id="{DB11429B-D7BC-9838-86A2-00F528FD4894}"/>
+                </a:ext>
+              </a:extLst>
+            </p:cNvPr>
+            <p:cNvSpPr/>
+            <p:nvPr/>
+          </p:nvSpPr>
+          <p:spPr>
+            <a:xfrm>
+              <a:off x="262465" y="248789"/>
+              <a:ext cx="2193292" cy="375920"/>
+            </a:xfrm>
+            <a:prstGeom prst="rect">
+              <a:avLst/>
+            </a:prstGeom>
+            <a:grpFill/>
+          </p:spPr>
+          <p:style>
+            <a:lnRef idx="2">
+              <a:schemeClr val="accent1">
+                <a:shade val="15000"/>
+              </a:schemeClr>
+            </a:lnRef>
+            <a:fillRef idx="1">
+              <a:schemeClr val="accent1"/>
+            </a:fillRef>
+            <a:effectRef idx="0">
+              <a:schemeClr val="accent1"/>
+            </a:effectRef>
+            <a:fontRef idx="minor">
+              <a:schemeClr val="lt1"/>
+            </a:fontRef>
+          </p:style>
+          <p:txBody>
+            <a:bodyPr rtlCol="0" anchor="ctr"/>
+            <a:lstStyle/>
+            <a:p>
+              <a:pPr algn="ctr"/>
+              <a:r>
+                <a:rPr lang="de-DE" sz="1600" b="1" dirty="0" err="1"/>
+                <a:t>Conceptual</a:t>
+              </a:r>
+              <a:r>
+                <a:rPr lang="de-DE" sz="1600" b="1" dirty="0"/>
+                <a:t> Model</a:t>
+              </a:r>
+            </a:p>
+          </p:txBody>
+        </p:sp>
+      </p:grpSp>
+      <p:grpSp>
+        <p:nvGrpSpPr>
+          <p:cNvPr id="107" name="Gruppieren 106">
+            <a:extLst>
+              <a:ext uri="{FF2B5EF4-FFF2-40B4-BE49-F238E27FC236}">
+                <a16:creationId xmlns:a16="http://schemas.microsoft.com/office/drawing/2014/main" id="{1D46D816-B073-BA3B-2053-1DD005298F05}"/>
+              </a:ext>
+            </a:extLst>
+          </p:cNvPr>
+          <p:cNvGrpSpPr/>
+          <p:nvPr/>
+        </p:nvGrpSpPr>
+        <p:grpSpPr>
+          <a:xfrm>
+            <a:off x="7341700" y="196851"/>
+            <a:ext cx="2048933" cy="6468534"/>
+            <a:chOff x="254000" y="248789"/>
+            <a:chExt cx="2201757" cy="6307043"/>
+          </a:xfrm>
+          <a:solidFill>
+            <a:schemeClr val="accent1">
+              <a:lumMod val="75000"/>
+            </a:schemeClr>
+          </a:solidFill>
+        </p:grpSpPr>
+        <p:sp>
+          <p:nvSpPr>
+            <p:cNvPr id="108" name="Rechteck 107">
+              <a:extLst>
+                <a:ext uri="{FF2B5EF4-FFF2-40B4-BE49-F238E27FC236}">
+                  <a16:creationId xmlns:a16="http://schemas.microsoft.com/office/drawing/2014/main" id="{F73E5D85-5052-E248-FDBE-ADC1A3F136F2}"/>
+                </a:ext>
+              </a:extLst>
+            </p:cNvPr>
+            <p:cNvSpPr/>
+            <p:nvPr/>
+          </p:nvSpPr>
+          <p:spPr>
+            <a:xfrm>
+              <a:off x="254000" y="248789"/>
+              <a:ext cx="2201757" cy="6307043"/>
+            </a:xfrm>
+            <a:prstGeom prst="rect">
+              <a:avLst/>
+            </a:prstGeom>
+            <a:grpFill/>
+          </p:spPr>
+          <p:style>
+            <a:lnRef idx="2">
+              <a:schemeClr val="accent1">
+                <a:shade val="15000"/>
+              </a:schemeClr>
+            </a:lnRef>
+            <a:fillRef idx="1">
+              <a:schemeClr val="accent1"/>
+            </a:fillRef>
+            <a:effectRef idx="0">
+              <a:schemeClr val="accent1"/>
+            </a:effectRef>
+            <a:fontRef idx="minor">
+              <a:schemeClr val="lt1"/>
+            </a:fontRef>
+          </p:style>
+          <p:txBody>
+            <a:bodyPr rtlCol="0" anchor="ctr"/>
+            <a:lstStyle/>
+            <a:p>
+              <a:pPr algn="ctr"/>
+              <a:endParaRPr lang="de-DE" dirty="0"/>
+            </a:p>
+          </p:txBody>
+        </p:sp>
+        <p:sp>
+          <p:nvSpPr>
+            <p:cNvPr id="109" name="Rechteck 108">
+              <a:extLst>
+                <a:ext uri="{FF2B5EF4-FFF2-40B4-BE49-F238E27FC236}">
+                  <a16:creationId xmlns:a16="http://schemas.microsoft.com/office/drawing/2014/main" id="{F47D7C98-D9B7-9250-571A-F93AE0A998C0}"/>
+                </a:ext>
+              </a:extLst>
+            </p:cNvPr>
+            <p:cNvSpPr/>
+            <p:nvPr/>
+          </p:nvSpPr>
+          <p:spPr>
+            <a:xfrm>
+              <a:off x="262465" y="248789"/>
+              <a:ext cx="2193292" cy="383257"/>
+            </a:xfrm>
+            <a:prstGeom prst="rect">
+              <a:avLst/>
+            </a:prstGeom>
+            <a:grpFill/>
+          </p:spPr>
+          <p:style>
+            <a:lnRef idx="2">
+              <a:schemeClr val="accent1">
+                <a:shade val="15000"/>
+              </a:schemeClr>
+            </a:lnRef>
+            <a:fillRef idx="1">
+              <a:schemeClr val="accent1"/>
+            </a:fillRef>
+            <a:effectRef idx="0">
+              <a:schemeClr val="accent1"/>
+            </a:effectRef>
+            <a:fontRef idx="minor">
+              <a:schemeClr val="lt1"/>
+            </a:fontRef>
+          </p:style>
+          <p:txBody>
+            <a:bodyPr rtlCol="0" anchor="ctr"/>
+            <a:lstStyle/>
+            <a:p>
+              <a:pPr algn="ctr"/>
+              <a:r>
+                <a:rPr lang="de-DE" sz="1600" b="1" dirty="0"/>
+                <a:t>Model </a:t>
+              </a:r>
+              <a:r>
+                <a:rPr lang="de-DE" sz="1600" b="1" dirty="0" err="1"/>
+                <a:t>Impl</a:t>
+              </a:r>
+              <a:r>
+                <a:rPr lang="de-DE" sz="1600" b="1" dirty="0"/>
+                <a:t>. &amp; </a:t>
+              </a:r>
+              <a:r>
+                <a:rPr lang="de-DE" sz="1600" b="1" dirty="0" err="1"/>
+                <a:t>Verif</a:t>
+              </a:r>
+              <a:r>
+                <a:rPr lang="de-DE" sz="1600" b="1" dirty="0"/>
+                <a:t>.</a:t>
+              </a:r>
+            </a:p>
+          </p:txBody>
+        </p:sp>
+      </p:grpSp>
+      <p:grpSp>
+        <p:nvGrpSpPr>
+          <p:cNvPr id="100" name="Gruppieren 99">
+            <a:extLst>
+              <a:ext uri="{FF2B5EF4-FFF2-40B4-BE49-F238E27FC236}">
+                <a16:creationId xmlns:a16="http://schemas.microsoft.com/office/drawing/2014/main" id="{034EA8D7-1FCB-2147-803B-10FF6DA6D864}"/>
+              </a:ext>
+            </a:extLst>
+          </p:cNvPr>
+          <p:cNvGrpSpPr/>
+          <p:nvPr/>
+        </p:nvGrpSpPr>
+        <p:grpSpPr>
+          <a:xfrm>
+            <a:off x="483954" y="196851"/>
+            <a:ext cx="2048933" cy="6468534"/>
+            <a:chOff x="254000" y="248789"/>
+            <a:chExt cx="2201757" cy="6307043"/>
+          </a:xfrm>
+          <a:solidFill>
+            <a:schemeClr val="accent3">
+              <a:lumMod val="60000"/>
+              <a:lumOff val="40000"/>
+            </a:schemeClr>
+          </a:solidFill>
+        </p:grpSpPr>
+        <p:sp>
+          <p:nvSpPr>
+            <p:cNvPr id="98" name="Rechteck 97">
+              <a:extLst>
+                <a:ext uri="{FF2B5EF4-FFF2-40B4-BE49-F238E27FC236}">
+                  <a16:creationId xmlns:a16="http://schemas.microsoft.com/office/drawing/2014/main" id="{3A188502-27D2-2122-F560-222DCC1DABF1}"/>
+                </a:ext>
+              </a:extLst>
+            </p:cNvPr>
+            <p:cNvSpPr/>
+            <p:nvPr/>
+          </p:nvSpPr>
+          <p:spPr>
+            <a:xfrm>
+              <a:off x="254000" y="248789"/>
+              <a:ext cx="2201757" cy="6307043"/>
+            </a:xfrm>
+            <a:prstGeom prst="rect">
+              <a:avLst/>
+            </a:prstGeom>
+            <a:solidFill>
+              <a:srgbClr val="00B050"/>
+            </a:solidFill>
+          </p:spPr>
+          <p:style>
+            <a:lnRef idx="2">
+              <a:schemeClr val="accent1">
+                <a:shade val="15000"/>
+              </a:schemeClr>
+            </a:lnRef>
+            <a:fillRef idx="1">
+              <a:schemeClr val="accent1"/>
+            </a:fillRef>
+            <a:effectRef idx="0">
+              <a:schemeClr val="accent1"/>
+            </a:effectRef>
+            <a:fontRef idx="minor">
+              <a:schemeClr val="lt1"/>
+            </a:fontRef>
+          </p:style>
+          <p:txBody>
+            <a:bodyPr rtlCol="0" anchor="ctr"/>
+            <a:lstStyle/>
+            <a:p>
+              <a:pPr algn="ctr"/>
+              <a:endParaRPr lang="de-DE" dirty="0"/>
+            </a:p>
+          </p:txBody>
+        </p:sp>
+        <p:sp>
+          <p:nvSpPr>
+            <p:cNvPr id="99" name="Rechteck 98">
+              <a:extLst>
+                <a:ext uri="{FF2B5EF4-FFF2-40B4-BE49-F238E27FC236}">
+                  <a16:creationId xmlns:a16="http://schemas.microsoft.com/office/drawing/2014/main" id="{B3DE7B06-EF5B-685E-E135-9FABDEC6F404}"/>
+                </a:ext>
+              </a:extLst>
+            </p:cNvPr>
+            <p:cNvSpPr/>
+            <p:nvPr/>
+          </p:nvSpPr>
+          <p:spPr>
+            <a:xfrm>
+              <a:off x="262465" y="248789"/>
+              <a:ext cx="2193292" cy="375920"/>
+            </a:xfrm>
+            <a:prstGeom prst="rect">
+              <a:avLst/>
+            </a:prstGeom>
+            <a:grpFill/>
+          </p:spPr>
+          <p:style>
+            <a:lnRef idx="2">
+              <a:schemeClr val="accent1">
+                <a:shade val="15000"/>
+              </a:schemeClr>
+            </a:lnRef>
+            <a:fillRef idx="1">
+              <a:schemeClr val="accent1"/>
+            </a:fillRef>
+            <a:effectRef idx="0">
+              <a:schemeClr val="accent1"/>
+            </a:effectRef>
+            <a:fontRef idx="minor">
+              <a:schemeClr val="lt1"/>
+            </a:fontRef>
+          </p:style>
+          <p:txBody>
+            <a:bodyPr rtlCol="0" anchor="ctr"/>
+            <a:lstStyle/>
+            <a:p>
+              <a:pPr algn="ctr"/>
+              <a:r>
+                <a:rPr lang="de-DE" sz="1600" b="1" dirty="0">
+                  <a:solidFill>
+                    <a:schemeClr val="tx1"/>
+                  </a:solidFill>
+                </a:rPr>
+                <a:t>Model Definition</a:t>
+              </a:r>
+            </a:p>
+          </p:txBody>
+        </p:sp>
+      </p:grpSp>
+      <p:grpSp>
+        <p:nvGrpSpPr>
+          <p:cNvPr id="20" name="Gruppieren 19">
+            <a:extLst>
+              <a:ext uri="{FF2B5EF4-FFF2-40B4-BE49-F238E27FC236}">
+                <a16:creationId xmlns:a16="http://schemas.microsoft.com/office/drawing/2014/main" id="{E24356CE-724D-B656-FA76-27553DC5BDFB}"/>
+              </a:ext>
+            </a:extLst>
+          </p:cNvPr>
+          <p:cNvGrpSpPr/>
+          <p:nvPr/>
+        </p:nvGrpSpPr>
+        <p:grpSpPr>
+          <a:xfrm>
+            <a:off x="690712" y="1329439"/>
+            <a:ext cx="1634066" cy="1212740"/>
+            <a:chOff x="762001" y="676655"/>
+            <a:chExt cx="1634066" cy="1212740"/>
+          </a:xfrm>
+        </p:grpSpPr>
+        <p:grpSp>
+          <p:nvGrpSpPr>
+            <p:cNvPr id="6" name="Gruppieren 5">
+              <a:extLst>
+                <a:ext uri="{FF2B5EF4-FFF2-40B4-BE49-F238E27FC236}">
+                  <a16:creationId xmlns:a16="http://schemas.microsoft.com/office/drawing/2014/main" id="{73CCC716-25E1-B469-019F-37A819ACA51F}"/>
+                </a:ext>
+              </a:extLst>
+            </p:cNvPr>
+            <p:cNvGrpSpPr/>
+            <p:nvPr/>
+          </p:nvGrpSpPr>
+          <p:grpSpPr>
+            <a:xfrm>
+              <a:off x="762001" y="676655"/>
+              <a:ext cx="1634066" cy="1207008"/>
+              <a:chOff x="677333" y="569114"/>
+              <a:chExt cx="1634067" cy="1051560"/>
+            </a:xfrm>
+            <a:solidFill>
+              <a:schemeClr val="tx2">
+                <a:lumMod val="75000"/>
+                <a:lumOff val="25000"/>
+              </a:schemeClr>
+            </a:solidFill>
+          </p:grpSpPr>
+          <p:sp>
+            <p:nvSpPr>
+              <p:cNvPr id="4" name="Rechteck 3">
+                <a:extLst>
+                  <a:ext uri="{FF2B5EF4-FFF2-40B4-BE49-F238E27FC236}">
+                    <a16:creationId xmlns:a16="http://schemas.microsoft.com/office/drawing/2014/main" id="{B13FC2B8-05BD-43E1-F683-B72BC1713AE4}"/>
+                  </a:ext>
+                </a:extLst>
+              </p:cNvPr>
+              <p:cNvSpPr/>
+              <p:nvPr/>
+            </p:nvSpPr>
+            <p:spPr>
+              <a:xfrm>
+                <a:off x="677333" y="643467"/>
+                <a:ext cx="1634067" cy="977207"/>
+              </a:xfrm>
+              <a:prstGeom prst="rect">
+                <a:avLst/>
+              </a:prstGeom>
+              <a:grpFill/>
+            </p:spPr>
+            <p:style>
+              <a:lnRef idx="2">
+                <a:schemeClr val="accent1">
+                  <a:shade val="15000"/>
+                </a:schemeClr>
+              </a:lnRef>
+              <a:fillRef idx="1">
+                <a:schemeClr val="accent1"/>
+              </a:fillRef>
+              <a:effectRef idx="0">
+                <a:schemeClr val="accent1"/>
+              </a:effectRef>
+              <a:fontRef idx="minor">
+                <a:schemeClr val="lt1"/>
+              </a:fontRef>
+            </p:style>
+            <p:txBody>
+              <a:bodyPr rtlCol="0" anchor="ctr"/>
+              <a:lstStyle/>
+              <a:p>
+                <a:pPr algn="ctr"/>
+                <a:endParaRPr lang="de-DE" dirty="0"/>
+              </a:p>
+            </p:txBody>
+          </p:sp>
+          <p:sp>
+            <p:nvSpPr>
+              <p:cNvPr id="5" name="Rechteck 4">
+                <a:extLst>
+                  <a:ext uri="{FF2B5EF4-FFF2-40B4-BE49-F238E27FC236}">
+                    <a16:creationId xmlns:a16="http://schemas.microsoft.com/office/drawing/2014/main" id="{1267CD1D-DC17-3AA0-1B6D-5DED545E6E73}"/>
+                  </a:ext>
+                </a:extLst>
+              </p:cNvPr>
+              <p:cNvSpPr/>
+              <p:nvPr/>
+            </p:nvSpPr>
+            <p:spPr>
+              <a:xfrm>
+                <a:off x="677333" y="569114"/>
+                <a:ext cx="1634067" cy="413020"/>
+              </a:xfrm>
+              <a:prstGeom prst="rect">
+                <a:avLst/>
+              </a:prstGeom>
+              <a:grpFill/>
+              <a:effectLst/>
+            </p:spPr>
+            <p:style>
+              <a:lnRef idx="2">
+                <a:schemeClr val="accent1">
+                  <a:shade val="15000"/>
+                </a:schemeClr>
+              </a:lnRef>
+              <a:fillRef idx="1">
+                <a:schemeClr val="accent1"/>
+              </a:fillRef>
+              <a:effectRef idx="0">
+                <a:schemeClr val="accent1"/>
+              </a:effectRef>
+              <a:fontRef idx="minor">
+                <a:schemeClr val="lt1"/>
+              </a:fontRef>
+            </p:style>
+            <p:txBody>
+              <a:bodyPr rtlCol="0" anchor="ctr"/>
+              <a:lstStyle/>
+              <a:p>
+                <a:pPr algn="ctr"/>
+                <a:r>
+                  <a:rPr lang="de-DE" sz="1200" b="1" dirty="0"/>
+                  <a:t>Model </a:t>
+                </a:r>
+                <a:r>
+                  <a:rPr lang="de-DE" sz="1200" b="1" dirty="0" err="1"/>
+                  <a:t>Requirements</a:t>
+                </a:r>
+                <a:r>
+                  <a:rPr lang="de-DE" sz="1200" b="1" dirty="0"/>
+                  <a:t> Definition</a:t>
+                </a:r>
+              </a:p>
+            </p:txBody>
+          </p:sp>
+        </p:grpSp>
+        <p:sp>
+          <p:nvSpPr>
+            <p:cNvPr id="10" name="Textfeld 9">
+              <a:extLst>
+                <a:ext uri="{FF2B5EF4-FFF2-40B4-BE49-F238E27FC236}">
+                  <a16:creationId xmlns:a16="http://schemas.microsoft.com/office/drawing/2014/main" id="{7EC9CCA7-92DF-82AE-1855-883B7573CCC2}"/>
+                </a:ext>
+              </a:extLst>
+            </p:cNvPr>
+            <p:cNvSpPr txBox="1"/>
+            <p:nvPr/>
+          </p:nvSpPr>
+          <p:spPr>
+            <a:xfrm>
+              <a:off x="1088136" y="1150731"/>
+              <a:ext cx="987552" cy="738664"/>
+            </a:xfrm>
+            <a:prstGeom prst="rect">
+              <a:avLst/>
+            </a:prstGeom>
+            <a:noFill/>
+          </p:spPr>
+          <p:txBody>
+            <a:bodyPr wrap="square" rtlCol="0">
+              <a:spAutoFit/>
+            </a:bodyPr>
+            <a:lstStyle/>
+            <a:p>
+              <a:pPr algn="ctr"/>
+              <a:r>
+                <a:rPr lang="de-DE" sz="1400" dirty="0">
+                  <a:solidFill>
+                    <a:schemeClr val="bg1"/>
+                  </a:solidFill>
+                </a:rPr>
+                <a:t>Julian</a:t>
+              </a:r>
+            </a:p>
+            <a:p>
+              <a:pPr algn="ctr"/>
+              <a:r>
+                <a:rPr lang="de-DE" sz="1400" dirty="0">
+                  <a:solidFill>
+                    <a:schemeClr val="bg1"/>
+                  </a:solidFill>
+                </a:rPr>
+                <a:t>Simon</a:t>
+              </a:r>
+            </a:p>
+            <a:p>
+              <a:pPr algn="ctr"/>
+              <a:r>
+                <a:rPr lang="de-DE" sz="1400" dirty="0">
+                  <a:solidFill>
+                    <a:schemeClr val="bg1"/>
+                  </a:solidFill>
+                </a:rPr>
+                <a:t>Bastian</a:t>
+              </a:r>
+            </a:p>
+          </p:txBody>
+        </p:sp>
+      </p:grpSp>
+      <p:grpSp>
+        <p:nvGrpSpPr>
+          <p:cNvPr id="19" name="Gruppieren 18">
+            <a:extLst>
+              <a:ext uri="{FF2B5EF4-FFF2-40B4-BE49-F238E27FC236}">
+                <a16:creationId xmlns:a16="http://schemas.microsoft.com/office/drawing/2014/main" id="{9BD65DE7-15AA-1AD6-052A-CE977DE2BC85}"/>
+              </a:ext>
+            </a:extLst>
+          </p:cNvPr>
+          <p:cNvGrpSpPr/>
+          <p:nvPr/>
+        </p:nvGrpSpPr>
+        <p:grpSpPr>
+          <a:xfrm>
+            <a:off x="690712" y="2705536"/>
+            <a:ext cx="1634066" cy="1212740"/>
+            <a:chOff x="762001" y="2216260"/>
+            <a:chExt cx="1634066" cy="1212740"/>
+          </a:xfrm>
+        </p:grpSpPr>
+        <p:grpSp>
+          <p:nvGrpSpPr>
+            <p:cNvPr id="11" name="Gruppieren 10">
+              <a:extLst>
+                <a:ext uri="{FF2B5EF4-FFF2-40B4-BE49-F238E27FC236}">
+                  <a16:creationId xmlns:a16="http://schemas.microsoft.com/office/drawing/2014/main" id="{53297CA6-9829-ED72-7CB8-1900D0B86826}"/>
+                </a:ext>
+              </a:extLst>
+            </p:cNvPr>
+            <p:cNvGrpSpPr/>
+            <p:nvPr/>
+          </p:nvGrpSpPr>
+          <p:grpSpPr>
+            <a:xfrm>
+              <a:off x="762001" y="2216260"/>
+              <a:ext cx="1634066" cy="1207008"/>
+              <a:chOff x="677333" y="569114"/>
+              <a:chExt cx="1634067" cy="1051560"/>
+            </a:xfrm>
+            <a:solidFill>
+              <a:schemeClr val="tx2">
+                <a:lumMod val="75000"/>
+                <a:lumOff val="25000"/>
+              </a:schemeClr>
+            </a:solidFill>
+          </p:grpSpPr>
+          <p:sp>
+            <p:nvSpPr>
+              <p:cNvPr id="12" name="Rechteck 11">
+                <a:extLst>
+                  <a:ext uri="{FF2B5EF4-FFF2-40B4-BE49-F238E27FC236}">
+                    <a16:creationId xmlns:a16="http://schemas.microsoft.com/office/drawing/2014/main" id="{EF830C95-8452-8D57-BB22-1F5663A9C91E}"/>
+                  </a:ext>
+                </a:extLst>
+              </p:cNvPr>
+              <p:cNvSpPr/>
+              <p:nvPr/>
+            </p:nvSpPr>
+            <p:spPr>
+              <a:xfrm>
+                <a:off x="677333" y="643467"/>
+                <a:ext cx="1634067" cy="977207"/>
+              </a:xfrm>
+              <a:prstGeom prst="rect">
+                <a:avLst/>
+              </a:prstGeom>
+              <a:grpFill/>
+            </p:spPr>
+            <p:style>
+              <a:lnRef idx="2">
+                <a:schemeClr val="accent1">
+                  <a:shade val="15000"/>
+                </a:schemeClr>
+              </a:lnRef>
+              <a:fillRef idx="1">
+                <a:schemeClr val="accent1"/>
+              </a:fillRef>
+              <a:effectRef idx="0">
+                <a:schemeClr val="accent1"/>
+              </a:effectRef>
+              <a:fontRef idx="minor">
+                <a:schemeClr val="lt1"/>
+              </a:fontRef>
+            </p:style>
+            <p:txBody>
+              <a:bodyPr rtlCol="0" anchor="ctr"/>
+              <a:lstStyle/>
+              <a:p>
+                <a:pPr algn="ctr"/>
+                <a:endParaRPr lang="de-DE" dirty="0"/>
+              </a:p>
+            </p:txBody>
+          </p:sp>
+          <p:sp>
+            <p:nvSpPr>
+              <p:cNvPr id="13" name="Rechteck 12">
+                <a:extLst>
+                  <a:ext uri="{FF2B5EF4-FFF2-40B4-BE49-F238E27FC236}">
+                    <a16:creationId xmlns:a16="http://schemas.microsoft.com/office/drawing/2014/main" id="{722E629D-91F4-7E4D-0A57-094F88D78D5E}"/>
+                  </a:ext>
+                </a:extLst>
+              </p:cNvPr>
+              <p:cNvSpPr/>
+              <p:nvPr/>
+            </p:nvSpPr>
+            <p:spPr>
+              <a:xfrm>
+                <a:off x="677333" y="569114"/>
+                <a:ext cx="1634067" cy="413020"/>
+              </a:xfrm>
+              <a:prstGeom prst="rect">
+                <a:avLst/>
+              </a:prstGeom>
+              <a:grpFill/>
+              <a:effectLst/>
+            </p:spPr>
+            <p:style>
+              <a:lnRef idx="2">
+                <a:schemeClr val="accent1">
+                  <a:shade val="15000"/>
+                </a:schemeClr>
+              </a:lnRef>
+              <a:fillRef idx="1">
+                <a:schemeClr val="accent1"/>
+              </a:fillRef>
+              <a:effectRef idx="0">
+                <a:schemeClr val="accent1"/>
+              </a:effectRef>
+              <a:fontRef idx="minor">
+                <a:schemeClr val="lt1"/>
+              </a:fontRef>
+            </p:style>
+            <p:txBody>
+              <a:bodyPr rtlCol="0" anchor="ctr"/>
+              <a:lstStyle/>
+              <a:p>
+                <a:pPr algn="ctr"/>
+                <a:r>
+                  <a:rPr lang="de-DE" sz="1200" b="1" dirty="0"/>
+                  <a:t>Project </a:t>
+                </a:r>
+                <a:r>
+                  <a:rPr lang="de-DE" sz="1200" b="1" dirty="0" err="1"/>
+                  <a:t>Organization</a:t>
+                </a:r>
+                <a:endParaRPr lang="de-DE" sz="1200" b="1" dirty="0"/>
+              </a:p>
+            </p:txBody>
+          </p:sp>
+        </p:grpSp>
+        <p:sp>
+          <p:nvSpPr>
+            <p:cNvPr id="14" name="Textfeld 13">
+              <a:extLst>
+                <a:ext uri="{FF2B5EF4-FFF2-40B4-BE49-F238E27FC236}">
+                  <a16:creationId xmlns:a16="http://schemas.microsoft.com/office/drawing/2014/main" id="{65AD7422-261C-A0CD-0294-369DA9438B1C}"/>
+                </a:ext>
+              </a:extLst>
+            </p:cNvPr>
+            <p:cNvSpPr txBox="1"/>
+            <p:nvPr/>
+          </p:nvSpPr>
+          <p:spPr>
+            <a:xfrm>
+              <a:off x="1088136" y="2690336"/>
+              <a:ext cx="987552" cy="738664"/>
+            </a:xfrm>
+            <a:prstGeom prst="rect">
+              <a:avLst/>
+            </a:prstGeom>
+            <a:noFill/>
+          </p:spPr>
+          <p:txBody>
+            <a:bodyPr wrap="square" rtlCol="0">
+              <a:spAutoFit/>
+            </a:bodyPr>
+            <a:lstStyle/>
+            <a:p>
+              <a:pPr algn="ctr"/>
+              <a:r>
+                <a:rPr lang="de-DE" sz="1400" dirty="0">
+                  <a:solidFill>
+                    <a:schemeClr val="bg1"/>
+                  </a:solidFill>
+                </a:rPr>
+                <a:t>Julian</a:t>
+              </a:r>
+            </a:p>
+            <a:p>
+              <a:pPr algn="ctr"/>
+              <a:r>
+                <a:rPr lang="de-DE" sz="1400" dirty="0">
+                  <a:solidFill>
+                    <a:schemeClr val="bg1"/>
+                  </a:solidFill>
+                </a:rPr>
+                <a:t>Simon</a:t>
+              </a:r>
+            </a:p>
+            <a:p>
+              <a:pPr algn="ctr"/>
+              <a:r>
+                <a:rPr lang="de-DE" sz="1400" dirty="0">
+                  <a:solidFill>
+                    <a:schemeClr val="bg1"/>
+                  </a:solidFill>
+                </a:rPr>
+                <a:t>Bastian</a:t>
+              </a:r>
+            </a:p>
+          </p:txBody>
+        </p:sp>
+      </p:grpSp>
+      <p:grpSp>
+        <p:nvGrpSpPr>
+          <p:cNvPr id="21" name="Gruppieren 20">
+            <a:extLst>
+              <a:ext uri="{FF2B5EF4-FFF2-40B4-BE49-F238E27FC236}">
+                <a16:creationId xmlns:a16="http://schemas.microsoft.com/office/drawing/2014/main" id="{9D27153A-F047-EB93-9A82-828A8E9E0B7A}"/>
+              </a:ext>
+            </a:extLst>
+          </p:cNvPr>
+          <p:cNvGrpSpPr/>
+          <p:nvPr/>
+        </p:nvGrpSpPr>
+        <p:grpSpPr>
+          <a:xfrm>
+            <a:off x="2978743" y="1336424"/>
+            <a:ext cx="1634066" cy="781853"/>
+            <a:chOff x="3031067" y="547226"/>
+            <a:chExt cx="1634066" cy="781853"/>
+          </a:xfrm>
+        </p:grpSpPr>
+        <p:grpSp>
+          <p:nvGrpSpPr>
+            <p:cNvPr id="15" name="Gruppieren 14">
+              <a:extLst>
+                <a:ext uri="{FF2B5EF4-FFF2-40B4-BE49-F238E27FC236}">
+                  <a16:creationId xmlns:a16="http://schemas.microsoft.com/office/drawing/2014/main" id="{69D05A6F-B594-88EA-3F39-AD50EBAE1D40}"/>
+                </a:ext>
+              </a:extLst>
+            </p:cNvPr>
+            <p:cNvGrpSpPr/>
+            <p:nvPr/>
+          </p:nvGrpSpPr>
+          <p:grpSpPr>
+            <a:xfrm>
+              <a:off x="3031067" y="547226"/>
+              <a:ext cx="1634066" cy="781853"/>
+              <a:chOff x="677333" y="569114"/>
+              <a:chExt cx="1634067" cy="681160"/>
+            </a:xfrm>
+            <a:solidFill>
+              <a:schemeClr val="tx2">
+                <a:lumMod val="75000"/>
+                <a:lumOff val="25000"/>
+              </a:schemeClr>
+            </a:solidFill>
+          </p:grpSpPr>
+          <p:sp>
+            <p:nvSpPr>
+              <p:cNvPr id="16" name="Rechteck 15">
+                <a:extLst>
+                  <a:ext uri="{FF2B5EF4-FFF2-40B4-BE49-F238E27FC236}">
+                    <a16:creationId xmlns:a16="http://schemas.microsoft.com/office/drawing/2014/main" id="{BFBFD482-927B-A619-3CBD-5BA2E3F44AAB}"/>
+                  </a:ext>
+                </a:extLst>
+              </p:cNvPr>
+              <p:cNvSpPr/>
+              <p:nvPr/>
+            </p:nvSpPr>
+            <p:spPr>
+              <a:xfrm>
+                <a:off x="677333" y="643467"/>
+                <a:ext cx="1634067" cy="606807"/>
+              </a:xfrm>
+              <a:prstGeom prst="rect">
+                <a:avLst/>
+              </a:prstGeom>
+              <a:grpFill/>
+            </p:spPr>
+            <p:style>
+              <a:lnRef idx="2">
+                <a:schemeClr val="accent1">
+                  <a:shade val="15000"/>
+                </a:schemeClr>
+              </a:lnRef>
+              <a:fillRef idx="1">
+                <a:schemeClr val="accent1"/>
+              </a:fillRef>
+              <a:effectRef idx="0">
+                <a:schemeClr val="accent1"/>
+              </a:effectRef>
+              <a:fontRef idx="minor">
+                <a:schemeClr val="lt1"/>
+              </a:fontRef>
+            </p:style>
+            <p:txBody>
+              <a:bodyPr rtlCol="0" anchor="ctr"/>
+              <a:lstStyle/>
+              <a:p>
+                <a:pPr algn="ctr"/>
+                <a:endParaRPr lang="de-DE" dirty="0"/>
+              </a:p>
+            </p:txBody>
+          </p:sp>
+          <p:sp>
+            <p:nvSpPr>
+              <p:cNvPr id="17" name="Rechteck 16">
+                <a:extLst>
+                  <a:ext uri="{FF2B5EF4-FFF2-40B4-BE49-F238E27FC236}">
+                    <a16:creationId xmlns:a16="http://schemas.microsoft.com/office/drawing/2014/main" id="{F06397C5-7819-2F4E-33C2-654B8EE66AA5}"/>
+                  </a:ext>
+                </a:extLst>
+              </p:cNvPr>
+              <p:cNvSpPr/>
+              <p:nvPr/>
+            </p:nvSpPr>
+            <p:spPr>
+              <a:xfrm>
+                <a:off x="677333" y="569114"/>
+                <a:ext cx="1634067" cy="413020"/>
+              </a:xfrm>
+              <a:prstGeom prst="rect">
+                <a:avLst/>
+              </a:prstGeom>
+              <a:grpFill/>
+              <a:effectLst/>
+            </p:spPr>
+            <p:style>
+              <a:lnRef idx="2">
+                <a:schemeClr val="accent1">
+                  <a:shade val="15000"/>
+                </a:schemeClr>
+              </a:lnRef>
+              <a:fillRef idx="1">
+                <a:schemeClr val="accent1"/>
+              </a:fillRef>
+              <a:effectRef idx="0">
+                <a:schemeClr val="accent1"/>
+              </a:effectRef>
+              <a:fontRef idx="minor">
+                <a:schemeClr val="lt1"/>
+              </a:fontRef>
+            </p:style>
+            <p:txBody>
+              <a:bodyPr rtlCol="0" anchor="ctr"/>
+              <a:lstStyle/>
+              <a:p>
+                <a:pPr algn="ctr"/>
+                <a:r>
+                  <a:rPr lang="de-DE" sz="1200" b="1" dirty="0" err="1"/>
+                  <a:t>Electricity</a:t>
+                </a:r>
+                <a:r>
+                  <a:rPr lang="de-DE" sz="1200" b="1" dirty="0"/>
+                  <a:t> Maps Scraper</a:t>
+                </a:r>
+              </a:p>
+            </p:txBody>
+          </p:sp>
+        </p:grpSp>
+        <p:sp>
+          <p:nvSpPr>
+            <p:cNvPr id="18" name="Textfeld 17">
+              <a:extLst>
+                <a:ext uri="{FF2B5EF4-FFF2-40B4-BE49-F238E27FC236}">
+                  <a16:creationId xmlns:a16="http://schemas.microsoft.com/office/drawing/2014/main" id="{CED3C485-7D03-557E-A766-1B722443B3EF}"/>
+                </a:ext>
+              </a:extLst>
+            </p:cNvPr>
+            <p:cNvSpPr txBox="1"/>
+            <p:nvPr/>
+          </p:nvSpPr>
+          <p:spPr>
+            <a:xfrm>
+              <a:off x="3357202" y="1021302"/>
+              <a:ext cx="987552" cy="307777"/>
+            </a:xfrm>
+            <a:prstGeom prst="rect">
+              <a:avLst/>
+            </a:prstGeom>
+            <a:noFill/>
+          </p:spPr>
+          <p:txBody>
+            <a:bodyPr wrap="square" rtlCol="0">
+              <a:spAutoFit/>
+            </a:bodyPr>
+            <a:lstStyle/>
+            <a:p>
+              <a:pPr algn="ctr"/>
+              <a:r>
+                <a:rPr lang="de-DE" sz="1400" dirty="0">
+                  <a:solidFill>
+                    <a:schemeClr val="bg1"/>
+                  </a:solidFill>
+                </a:rPr>
+                <a:t>Bastian</a:t>
+              </a:r>
+            </a:p>
+          </p:txBody>
+        </p:sp>
+      </p:grpSp>
+      <p:grpSp>
+        <p:nvGrpSpPr>
+          <p:cNvPr id="22" name="Gruppieren 21">
+            <a:extLst>
+              <a:ext uri="{FF2B5EF4-FFF2-40B4-BE49-F238E27FC236}">
+                <a16:creationId xmlns:a16="http://schemas.microsoft.com/office/drawing/2014/main" id="{F5B3219F-7FC1-3FA8-8014-1462F9FF327D}"/>
+              </a:ext>
+            </a:extLst>
+          </p:cNvPr>
+          <p:cNvGrpSpPr/>
+          <p:nvPr/>
+        </p:nvGrpSpPr>
+        <p:grpSpPr>
+          <a:xfrm>
+            <a:off x="2978743" y="2314610"/>
+            <a:ext cx="1634066" cy="781853"/>
+            <a:chOff x="762001" y="2216260"/>
+            <a:chExt cx="1634066" cy="781853"/>
+          </a:xfrm>
+        </p:grpSpPr>
+        <p:grpSp>
+          <p:nvGrpSpPr>
+            <p:cNvPr id="23" name="Gruppieren 22">
+              <a:extLst>
+                <a:ext uri="{FF2B5EF4-FFF2-40B4-BE49-F238E27FC236}">
+                  <a16:creationId xmlns:a16="http://schemas.microsoft.com/office/drawing/2014/main" id="{A83CB933-4C05-3EC5-A7AE-7A8270D2F97E}"/>
+                </a:ext>
+              </a:extLst>
+            </p:cNvPr>
+            <p:cNvGrpSpPr/>
+            <p:nvPr/>
+          </p:nvGrpSpPr>
+          <p:grpSpPr>
+            <a:xfrm>
+              <a:off x="762001" y="2216260"/>
+              <a:ext cx="1634066" cy="781853"/>
+              <a:chOff x="677333" y="569114"/>
+              <a:chExt cx="1634067" cy="681160"/>
+            </a:xfrm>
+            <a:solidFill>
+              <a:schemeClr val="tx2">
+                <a:lumMod val="75000"/>
+                <a:lumOff val="25000"/>
+              </a:schemeClr>
+            </a:solidFill>
+          </p:grpSpPr>
+          <p:sp>
+            <p:nvSpPr>
+              <p:cNvPr id="25" name="Rechteck 24">
+                <a:extLst>
+                  <a:ext uri="{FF2B5EF4-FFF2-40B4-BE49-F238E27FC236}">
+                    <a16:creationId xmlns:a16="http://schemas.microsoft.com/office/drawing/2014/main" id="{1CB58BCB-30B3-EFEA-D8F3-6ECD3DABC036}"/>
+                  </a:ext>
+                </a:extLst>
+              </p:cNvPr>
+              <p:cNvSpPr/>
+              <p:nvPr/>
+            </p:nvSpPr>
+            <p:spPr>
+              <a:xfrm>
+                <a:off x="677333" y="643467"/>
+                <a:ext cx="1634067" cy="606807"/>
+              </a:xfrm>
+              <a:prstGeom prst="rect">
+                <a:avLst/>
+              </a:prstGeom>
+              <a:grpFill/>
+            </p:spPr>
+            <p:style>
+              <a:lnRef idx="2">
+                <a:schemeClr val="accent1">
+                  <a:shade val="15000"/>
+                </a:schemeClr>
+              </a:lnRef>
+              <a:fillRef idx="1">
+                <a:schemeClr val="accent1"/>
+              </a:fillRef>
+              <a:effectRef idx="0">
+                <a:schemeClr val="accent1"/>
+              </a:effectRef>
+              <a:fontRef idx="minor">
+                <a:schemeClr val="lt1"/>
+              </a:fontRef>
+            </p:style>
+            <p:txBody>
+              <a:bodyPr rtlCol="0" anchor="ctr"/>
+              <a:lstStyle/>
+              <a:p>
+                <a:pPr algn="ctr"/>
+                <a:endParaRPr lang="de-DE" dirty="0"/>
+              </a:p>
+            </p:txBody>
+          </p:sp>
+          <p:sp>
+            <p:nvSpPr>
+              <p:cNvPr id="26" name="Rechteck 25">
+                <a:extLst>
+                  <a:ext uri="{FF2B5EF4-FFF2-40B4-BE49-F238E27FC236}">
+                    <a16:creationId xmlns:a16="http://schemas.microsoft.com/office/drawing/2014/main" id="{F0BF068F-05CC-5A5B-A37F-187826CA62F4}"/>
+                  </a:ext>
+                </a:extLst>
+              </p:cNvPr>
+              <p:cNvSpPr/>
+              <p:nvPr/>
+            </p:nvSpPr>
+            <p:spPr>
+              <a:xfrm>
+                <a:off x="677333" y="569114"/>
+                <a:ext cx="1634067" cy="413020"/>
+              </a:xfrm>
+              <a:prstGeom prst="rect">
+                <a:avLst/>
+              </a:prstGeom>
+              <a:grpFill/>
+              <a:effectLst/>
+            </p:spPr>
+            <p:style>
+              <a:lnRef idx="2">
+                <a:schemeClr val="accent1">
+                  <a:shade val="15000"/>
+                </a:schemeClr>
+              </a:lnRef>
+              <a:fillRef idx="1">
+                <a:schemeClr val="accent1"/>
+              </a:fillRef>
+              <a:effectRef idx="0">
+                <a:schemeClr val="accent1"/>
+              </a:effectRef>
+              <a:fontRef idx="minor">
+                <a:schemeClr val="lt1"/>
+              </a:fontRef>
+            </p:style>
+            <p:txBody>
+              <a:bodyPr rtlCol="0" anchor="ctr"/>
+              <a:lstStyle/>
+              <a:p>
+                <a:pPr algn="ctr"/>
+                <a:r>
+                  <a:rPr lang="de-DE" sz="1200" b="1" dirty="0"/>
+                  <a:t>Parameter Research Kimi K2.6</a:t>
+                </a:r>
+              </a:p>
+            </p:txBody>
+          </p:sp>
+        </p:grpSp>
+        <p:sp>
+          <p:nvSpPr>
+            <p:cNvPr id="24" name="Textfeld 23">
+              <a:extLst>
+                <a:ext uri="{FF2B5EF4-FFF2-40B4-BE49-F238E27FC236}">
+                  <a16:creationId xmlns:a16="http://schemas.microsoft.com/office/drawing/2014/main" id="{6A0147CE-1E3A-5C92-0E9A-778B9B7A86D4}"/>
+                </a:ext>
+              </a:extLst>
+            </p:cNvPr>
+            <p:cNvSpPr txBox="1"/>
+            <p:nvPr/>
+          </p:nvSpPr>
+          <p:spPr>
+            <a:xfrm>
+              <a:off x="1088136" y="2690336"/>
+              <a:ext cx="987552" cy="307777"/>
+            </a:xfrm>
+            <a:prstGeom prst="rect">
+              <a:avLst/>
+            </a:prstGeom>
+            <a:noFill/>
+          </p:spPr>
+          <p:txBody>
+            <a:bodyPr wrap="square" rtlCol="0">
+              <a:spAutoFit/>
+            </a:bodyPr>
+            <a:lstStyle/>
+            <a:p>
+              <a:pPr algn="ctr"/>
+              <a:r>
+                <a:rPr lang="de-DE" sz="1400" dirty="0">
+                  <a:solidFill>
+                    <a:schemeClr val="bg1"/>
+                  </a:solidFill>
+                </a:rPr>
+                <a:t>Simon</a:t>
+              </a:r>
+            </a:p>
+          </p:txBody>
+        </p:sp>
+      </p:grpSp>
+      <p:grpSp>
+        <p:nvGrpSpPr>
+          <p:cNvPr id="27" name="Gruppieren 26">
+            <a:extLst>
+              <a:ext uri="{FF2B5EF4-FFF2-40B4-BE49-F238E27FC236}">
+                <a16:creationId xmlns:a16="http://schemas.microsoft.com/office/drawing/2014/main" id="{29D9E94A-E11C-25F8-76C9-985BE8C004D5}"/>
+              </a:ext>
+            </a:extLst>
+          </p:cNvPr>
+          <p:cNvGrpSpPr/>
+          <p:nvPr/>
+        </p:nvGrpSpPr>
+        <p:grpSpPr>
+          <a:xfrm>
+            <a:off x="2978743" y="4262800"/>
+            <a:ext cx="1634066" cy="781853"/>
+            <a:chOff x="762001" y="2216260"/>
+            <a:chExt cx="1634066" cy="781853"/>
+          </a:xfrm>
+        </p:grpSpPr>
+        <p:grpSp>
+          <p:nvGrpSpPr>
+            <p:cNvPr id="28" name="Gruppieren 27">
+              <a:extLst>
+                <a:ext uri="{FF2B5EF4-FFF2-40B4-BE49-F238E27FC236}">
+                  <a16:creationId xmlns:a16="http://schemas.microsoft.com/office/drawing/2014/main" id="{55C4287E-3672-D862-8E93-C3B377F99403}"/>
+                </a:ext>
+              </a:extLst>
+            </p:cNvPr>
+            <p:cNvGrpSpPr/>
+            <p:nvPr/>
+          </p:nvGrpSpPr>
+          <p:grpSpPr>
+            <a:xfrm>
+              <a:off x="762001" y="2216260"/>
+              <a:ext cx="1634066" cy="781853"/>
+              <a:chOff x="677333" y="569114"/>
+              <a:chExt cx="1634067" cy="681160"/>
+            </a:xfrm>
+            <a:solidFill>
+              <a:schemeClr val="tx2">
+                <a:lumMod val="75000"/>
+                <a:lumOff val="25000"/>
+              </a:schemeClr>
+            </a:solidFill>
+          </p:grpSpPr>
+          <p:sp>
+            <p:nvSpPr>
+              <p:cNvPr id="30" name="Rechteck 29">
+                <a:extLst>
+                  <a:ext uri="{FF2B5EF4-FFF2-40B4-BE49-F238E27FC236}">
+                    <a16:creationId xmlns:a16="http://schemas.microsoft.com/office/drawing/2014/main" id="{A260944C-4CCA-4674-98F6-680B81D46C99}"/>
+                  </a:ext>
+                </a:extLst>
+              </p:cNvPr>
+              <p:cNvSpPr/>
+              <p:nvPr/>
+            </p:nvSpPr>
+            <p:spPr>
+              <a:xfrm>
+                <a:off x="677333" y="643467"/>
+                <a:ext cx="1634067" cy="606807"/>
+              </a:xfrm>
+              <a:prstGeom prst="rect">
+                <a:avLst/>
+              </a:prstGeom>
+              <a:grpFill/>
+            </p:spPr>
+            <p:style>
+              <a:lnRef idx="2">
+                <a:schemeClr val="accent1">
+                  <a:shade val="15000"/>
+                </a:schemeClr>
+              </a:lnRef>
+              <a:fillRef idx="1">
+                <a:schemeClr val="accent1"/>
+              </a:fillRef>
+              <a:effectRef idx="0">
+                <a:schemeClr val="accent1"/>
+              </a:effectRef>
+              <a:fontRef idx="minor">
+                <a:schemeClr val="lt1"/>
+              </a:fontRef>
+            </p:style>
+            <p:txBody>
+              <a:bodyPr rtlCol="0" anchor="ctr"/>
+              <a:lstStyle/>
+              <a:p>
+                <a:pPr algn="ctr"/>
+                <a:endParaRPr lang="de-DE" dirty="0"/>
+              </a:p>
+            </p:txBody>
+          </p:sp>
+          <p:sp>
+            <p:nvSpPr>
+              <p:cNvPr id="31" name="Rechteck 30">
+                <a:extLst>
+                  <a:ext uri="{FF2B5EF4-FFF2-40B4-BE49-F238E27FC236}">
+                    <a16:creationId xmlns:a16="http://schemas.microsoft.com/office/drawing/2014/main" id="{3BC6F381-C806-5822-8500-10219410A061}"/>
+                  </a:ext>
+                </a:extLst>
+              </p:cNvPr>
+              <p:cNvSpPr/>
+              <p:nvPr/>
+            </p:nvSpPr>
+            <p:spPr>
+              <a:xfrm>
+                <a:off x="677333" y="569114"/>
+                <a:ext cx="1634067" cy="413020"/>
+              </a:xfrm>
+              <a:prstGeom prst="rect">
+                <a:avLst/>
+              </a:prstGeom>
+              <a:grpFill/>
+              <a:effectLst/>
+            </p:spPr>
+            <p:style>
+              <a:lnRef idx="2">
+                <a:schemeClr val="accent1">
+                  <a:shade val="15000"/>
+                </a:schemeClr>
+              </a:lnRef>
+              <a:fillRef idx="1">
+                <a:schemeClr val="accent1"/>
+              </a:fillRef>
+              <a:effectRef idx="0">
+                <a:schemeClr val="accent1"/>
+              </a:effectRef>
+              <a:fontRef idx="minor">
+                <a:schemeClr val="lt1"/>
+              </a:fontRef>
+            </p:style>
+            <p:txBody>
+              <a:bodyPr rtlCol="0" anchor="ctr"/>
+              <a:lstStyle/>
+              <a:p>
+                <a:pPr algn="ctr"/>
+                <a:r>
+                  <a:rPr lang="de-DE" sz="1200" b="1" dirty="0"/>
+                  <a:t>Parameter Research Datacenter &amp; GPU</a:t>
+                </a:r>
+              </a:p>
+            </p:txBody>
+          </p:sp>
+        </p:grpSp>
+        <p:sp>
+          <p:nvSpPr>
+            <p:cNvPr id="29" name="Textfeld 28">
+              <a:extLst>
+                <a:ext uri="{FF2B5EF4-FFF2-40B4-BE49-F238E27FC236}">
+                  <a16:creationId xmlns:a16="http://schemas.microsoft.com/office/drawing/2014/main" id="{DE6BB78F-5A5B-464A-2DC9-EF71B1A950ED}"/>
+                </a:ext>
+              </a:extLst>
+            </p:cNvPr>
+            <p:cNvSpPr txBox="1"/>
+            <p:nvPr/>
+          </p:nvSpPr>
+          <p:spPr>
+            <a:xfrm>
+              <a:off x="1088136" y="2690336"/>
+              <a:ext cx="987552" cy="307777"/>
+            </a:xfrm>
+            <a:prstGeom prst="rect">
+              <a:avLst/>
+            </a:prstGeom>
+            <a:noFill/>
+          </p:spPr>
+          <p:txBody>
+            <a:bodyPr wrap="square" rtlCol="0">
+              <a:spAutoFit/>
+            </a:bodyPr>
+            <a:lstStyle/>
+            <a:p>
+              <a:pPr algn="ctr"/>
+              <a:r>
+                <a:rPr lang="de-DE" sz="1400" dirty="0">
+                  <a:solidFill>
+                    <a:schemeClr val="bg1"/>
+                  </a:solidFill>
+                </a:rPr>
+                <a:t>Julian</a:t>
+              </a:r>
+            </a:p>
+          </p:txBody>
+        </p:sp>
+      </p:grpSp>
+      <p:grpSp>
+        <p:nvGrpSpPr>
+          <p:cNvPr id="32" name="Gruppieren 31">
+            <a:extLst>
+              <a:ext uri="{FF2B5EF4-FFF2-40B4-BE49-F238E27FC236}">
+                <a16:creationId xmlns:a16="http://schemas.microsoft.com/office/drawing/2014/main" id="{712CE440-98B0-0AF1-D521-64697ED3BF00}"/>
+              </a:ext>
+            </a:extLst>
+          </p:cNvPr>
+          <p:cNvGrpSpPr/>
+          <p:nvPr/>
+        </p:nvGrpSpPr>
+        <p:grpSpPr>
+          <a:xfrm>
+            <a:off x="2978743" y="3289287"/>
+            <a:ext cx="1634066" cy="781853"/>
+            <a:chOff x="762001" y="2216260"/>
+            <a:chExt cx="1634066" cy="781853"/>
+          </a:xfrm>
+        </p:grpSpPr>
+        <p:grpSp>
+          <p:nvGrpSpPr>
+            <p:cNvPr id="33" name="Gruppieren 32">
+              <a:extLst>
+                <a:ext uri="{FF2B5EF4-FFF2-40B4-BE49-F238E27FC236}">
+                  <a16:creationId xmlns:a16="http://schemas.microsoft.com/office/drawing/2014/main" id="{BB889AF7-79A7-B9A0-51EC-66F16F97786F}"/>
+                </a:ext>
+              </a:extLst>
+            </p:cNvPr>
+            <p:cNvGrpSpPr/>
+            <p:nvPr/>
+          </p:nvGrpSpPr>
+          <p:grpSpPr>
+            <a:xfrm>
+              <a:off x="762001" y="2216260"/>
+              <a:ext cx="1634066" cy="781853"/>
+              <a:chOff x="677333" y="569114"/>
+              <a:chExt cx="1634067" cy="681160"/>
+            </a:xfrm>
+            <a:solidFill>
+              <a:schemeClr val="tx2">
+                <a:lumMod val="75000"/>
+                <a:lumOff val="25000"/>
+              </a:schemeClr>
+            </a:solidFill>
+          </p:grpSpPr>
+          <p:sp>
+            <p:nvSpPr>
+              <p:cNvPr id="35" name="Rechteck 34">
+                <a:extLst>
+                  <a:ext uri="{FF2B5EF4-FFF2-40B4-BE49-F238E27FC236}">
+                    <a16:creationId xmlns:a16="http://schemas.microsoft.com/office/drawing/2014/main" id="{12E81B3B-6B21-2457-5113-0426D4692DD3}"/>
+                  </a:ext>
+                </a:extLst>
+              </p:cNvPr>
+              <p:cNvSpPr/>
+              <p:nvPr/>
+            </p:nvSpPr>
+            <p:spPr>
+              <a:xfrm>
+                <a:off x="677333" y="643467"/>
+                <a:ext cx="1634067" cy="606807"/>
+              </a:xfrm>
+              <a:prstGeom prst="rect">
+                <a:avLst/>
+              </a:prstGeom>
+              <a:grpFill/>
+            </p:spPr>
+            <p:style>
+              <a:lnRef idx="2">
+                <a:schemeClr val="accent1">
+                  <a:shade val="15000"/>
+                </a:schemeClr>
+              </a:lnRef>
+              <a:fillRef idx="1">
+                <a:schemeClr val="accent1"/>
+              </a:fillRef>
+              <a:effectRef idx="0">
+                <a:schemeClr val="accent1"/>
+              </a:effectRef>
+              <a:fontRef idx="minor">
+                <a:schemeClr val="lt1"/>
+              </a:fontRef>
+            </p:style>
+            <p:txBody>
+              <a:bodyPr rtlCol="0" anchor="ctr"/>
+              <a:lstStyle/>
+              <a:p>
+                <a:pPr algn="ctr"/>
+                <a:endParaRPr lang="de-DE" dirty="0"/>
+              </a:p>
+            </p:txBody>
+          </p:sp>
+          <p:sp>
+            <p:nvSpPr>
+              <p:cNvPr id="36" name="Rechteck 35">
+                <a:extLst>
+                  <a:ext uri="{FF2B5EF4-FFF2-40B4-BE49-F238E27FC236}">
+                    <a16:creationId xmlns:a16="http://schemas.microsoft.com/office/drawing/2014/main" id="{83EC59ED-BC50-9097-9974-17F30EF2B141}"/>
+                  </a:ext>
+                </a:extLst>
+              </p:cNvPr>
+              <p:cNvSpPr/>
+              <p:nvPr/>
+            </p:nvSpPr>
+            <p:spPr>
+              <a:xfrm>
+                <a:off x="677333" y="569114"/>
+                <a:ext cx="1634067" cy="413020"/>
+              </a:xfrm>
+              <a:prstGeom prst="rect">
+                <a:avLst/>
+              </a:prstGeom>
+              <a:grpFill/>
+              <a:effectLst/>
+            </p:spPr>
+            <p:style>
+              <a:lnRef idx="2">
+                <a:schemeClr val="accent1">
+                  <a:shade val="15000"/>
+                </a:schemeClr>
+              </a:lnRef>
+              <a:fillRef idx="1">
+                <a:schemeClr val="accent1"/>
+              </a:fillRef>
+              <a:effectRef idx="0">
+                <a:schemeClr val="accent1"/>
+              </a:effectRef>
+              <a:fontRef idx="minor">
+                <a:schemeClr val="lt1"/>
+              </a:fontRef>
+            </p:style>
+            <p:txBody>
+              <a:bodyPr rtlCol="0" anchor="ctr"/>
+              <a:lstStyle/>
+              <a:p>
+                <a:pPr algn="ctr"/>
+                <a:r>
+                  <a:rPr lang="de-DE" sz="1200" b="1" dirty="0"/>
+                  <a:t>Parameter Research DeepSeek V3</a:t>
+                </a:r>
+              </a:p>
+            </p:txBody>
+          </p:sp>
+        </p:grpSp>
+        <p:sp>
+          <p:nvSpPr>
+            <p:cNvPr id="34" name="Textfeld 33">
+              <a:extLst>
+                <a:ext uri="{FF2B5EF4-FFF2-40B4-BE49-F238E27FC236}">
+                  <a16:creationId xmlns:a16="http://schemas.microsoft.com/office/drawing/2014/main" id="{47D5DF86-BE76-BA3B-E6A8-D3755A3C596A}"/>
+                </a:ext>
+              </a:extLst>
+            </p:cNvPr>
+            <p:cNvSpPr txBox="1"/>
+            <p:nvPr/>
+          </p:nvSpPr>
+          <p:spPr>
+            <a:xfrm>
+              <a:off x="1088136" y="2690336"/>
+              <a:ext cx="987552" cy="307777"/>
+            </a:xfrm>
+            <a:prstGeom prst="rect">
+              <a:avLst/>
+            </a:prstGeom>
+            <a:noFill/>
+          </p:spPr>
+          <p:txBody>
+            <a:bodyPr wrap="square" rtlCol="0">
+              <a:spAutoFit/>
+            </a:bodyPr>
+            <a:lstStyle/>
+            <a:p>
+              <a:pPr algn="ctr"/>
+              <a:r>
+                <a:rPr lang="de-DE" sz="1400" dirty="0">
+                  <a:solidFill>
+                    <a:schemeClr val="bg1"/>
+                  </a:solidFill>
+                </a:rPr>
+                <a:t>Simon</a:t>
+              </a:r>
+            </a:p>
+          </p:txBody>
+        </p:sp>
+      </p:grpSp>
+      <p:grpSp>
+        <p:nvGrpSpPr>
+          <p:cNvPr id="37" name="Gruppieren 36">
+            <a:extLst>
+              <a:ext uri="{FF2B5EF4-FFF2-40B4-BE49-F238E27FC236}">
+                <a16:creationId xmlns:a16="http://schemas.microsoft.com/office/drawing/2014/main" id="{8A925402-3238-E184-21C4-6374C131626F}"/>
+              </a:ext>
+            </a:extLst>
+          </p:cNvPr>
+          <p:cNvGrpSpPr/>
+          <p:nvPr/>
+        </p:nvGrpSpPr>
+        <p:grpSpPr>
+          <a:xfrm>
+            <a:off x="5264658" y="1335171"/>
+            <a:ext cx="1634066" cy="1212740"/>
+            <a:chOff x="762001" y="676655"/>
+            <a:chExt cx="1634066" cy="1212740"/>
+          </a:xfrm>
+        </p:grpSpPr>
+        <p:grpSp>
+          <p:nvGrpSpPr>
+            <p:cNvPr id="38" name="Gruppieren 37">
+              <a:extLst>
+                <a:ext uri="{FF2B5EF4-FFF2-40B4-BE49-F238E27FC236}">
+                  <a16:creationId xmlns:a16="http://schemas.microsoft.com/office/drawing/2014/main" id="{9FAC4C60-20E4-A58B-D121-64E650A0B6B6}"/>
+                </a:ext>
+              </a:extLst>
+            </p:cNvPr>
+            <p:cNvGrpSpPr/>
+            <p:nvPr/>
+          </p:nvGrpSpPr>
+          <p:grpSpPr>
+            <a:xfrm>
+              <a:off x="762001" y="676655"/>
+              <a:ext cx="1634066" cy="1207008"/>
+              <a:chOff x="677333" y="569114"/>
+              <a:chExt cx="1634067" cy="1051560"/>
+            </a:xfrm>
+            <a:solidFill>
+              <a:schemeClr val="tx2">
+                <a:lumMod val="75000"/>
+                <a:lumOff val="25000"/>
+              </a:schemeClr>
+            </a:solidFill>
+          </p:grpSpPr>
+          <p:sp>
+            <p:nvSpPr>
+              <p:cNvPr id="40" name="Rechteck 39">
+                <a:extLst>
+                  <a:ext uri="{FF2B5EF4-FFF2-40B4-BE49-F238E27FC236}">
+                    <a16:creationId xmlns:a16="http://schemas.microsoft.com/office/drawing/2014/main" id="{A8EBD027-C7EE-6E47-E993-A415DF1CC647}"/>
+                  </a:ext>
+                </a:extLst>
+              </p:cNvPr>
+              <p:cNvSpPr/>
+              <p:nvPr/>
+            </p:nvSpPr>
+            <p:spPr>
+              <a:xfrm>
+                <a:off x="677333" y="643467"/>
+                <a:ext cx="1634067" cy="977207"/>
+              </a:xfrm>
+              <a:prstGeom prst="rect">
+                <a:avLst/>
+              </a:prstGeom>
+              <a:grpFill/>
+            </p:spPr>
+            <p:style>
+              <a:lnRef idx="2">
+                <a:schemeClr val="accent1">
+                  <a:shade val="15000"/>
+                </a:schemeClr>
+              </a:lnRef>
+              <a:fillRef idx="1">
+                <a:schemeClr val="accent1"/>
+              </a:fillRef>
+              <a:effectRef idx="0">
+                <a:schemeClr val="accent1"/>
+              </a:effectRef>
+              <a:fontRef idx="minor">
+                <a:schemeClr val="lt1"/>
+              </a:fontRef>
+            </p:style>
+            <p:txBody>
+              <a:bodyPr rtlCol="0" anchor="ctr"/>
+              <a:lstStyle/>
+              <a:p>
+                <a:pPr algn="ctr"/>
+                <a:endParaRPr lang="de-DE" dirty="0"/>
+              </a:p>
+            </p:txBody>
+          </p:sp>
+          <p:sp>
+            <p:nvSpPr>
+              <p:cNvPr id="41" name="Rechteck 40">
+                <a:extLst>
+                  <a:ext uri="{FF2B5EF4-FFF2-40B4-BE49-F238E27FC236}">
+                    <a16:creationId xmlns:a16="http://schemas.microsoft.com/office/drawing/2014/main" id="{F2EA8A06-F7F4-F120-0393-E9E1AF610167}"/>
+                  </a:ext>
+                </a:extLst>
+              </p:cNvPr>
+              <p:cNvSpPr/>
+              <p:nvPr/>
+            </p:nvSpPr>
+            <p:spPr>
+              <a:xfrm>
+                <a:off x="677333" y="569114"/>
+                <a:ext cx="1634067" cy="413020"/>
+              </a:xfrm>
+              <a:prstGeom prst="rect">
+                <a:avLst/>
+              </a:prstGeom>
+              <a:grpFill/>
+              <a:effectLst/>
+            </p:spPr>
+            <p:style>
+              <a:lnRef idx="2">
+                <a:schemeClr val="accent1">
+                  <a:shade val="15000"/>
+                </a:schemeClr>
+              </a:lnRef>
+              <a:fillRef idx="1">
+                <a:schemeClr val="accent1"/>
+              </a:fillRef>
+              <a:effectRef idx="0">
+                <a:schemeClr val="accent1"/>
+              </a:effectRef>
+              <a:fontRef idx="minor">
+                <a:schemeClr val="lt1"/>
+              </a:fontRef>
+            </p:style>
+            <p:txBody>
+              <a:bodyPr rtlCol="0" anchor="ctr"/>
+              <a:lstStyle/>
+              <a:p>
+                <a:pPr algn="ctr"/>
+                <a:r>
+                  <a:rPr lang="de-DE" sz="1200" b="1" dirty="0"/>
+                  <a:t>Create </a:t>
+                </a:r>
+                <a:r>
+                  <a:rPr lang="de-DE" sz="1200" b="1" dirty="0" err="1"/>
+                  <a:t>Activity</a:t>
+                </a:r>
+                <a:r>
+                  <a:rPr lang="de-DE" sz="1200" b="1" dirty="0"/>
+                  <a:t> </a:t>
+                </a:r>
+                <a:r>
+                  <a:rPr lang="de-DE" sz="1200" b="1" dirty="0" err="1"/>
+                  <a:t>Diagram</a:t>
+                </a:r>
+                <a:endParaRPr lang="de-DE" sz="1200" b="1" dirty="0"/>
+              </a:p>
+            </p:txBody>
+          </p:sp>
+        </p:grpSp>
+        <p:sp>
+          <p:nvSpPr>
+            <p:cNvPr id="39" name="Textfeld 38">
+              <a:extLst>
+                <a:ext uri="{FF2B5EF4-FFF2-40B4-BE49-F238E27FC236}">
+                  <a16:creationId xmlns:a16="http://schemas.microsoft.com/office/drawing/2014/main" id="{C64AC02F-B72D-5E3F-D262-BA6F663AE7CD}"/>
+                </a:ext>
+              </a:extLst>
+            </p:cNvPr>
+            <p:cNvSpPr txBox="1"/>
+            <p:nvPr/>
+          </p:nvSpPr>
+          <p:spPr>
+            <a:xfrm>
+              <a:off x="1088136" y="1150731"/>
+              <a:ext cx="987552" cy="738664"/>
+            </a:xfrm>
+            <a:prstGeom prst="rect">
+              <a:avLst/>
+            </a:prstGeom>
+            <a:noFill/>
+          </p:spPr>
+          <p:txBody>
+            <a:bodyPr wrap="square" rtlCol="0">
+              <a:spAutoFit/>
+            </a:bodyPr>
+            <a:lstStyle/>
+            <a:p>
+              <a:pPr algn="ctr"/>
+              <a:r>
+                <a:rPr lang="de-DE" sz="1400" dirty="0">
+                  <a:solidFill>
+                    <a:schemeClr val="bg1"/>
+                  </a:solidFill>
+                </a:rPr>
+                <a:t>Julian</a:t>
+              </a:r>
+            </a:p>
+            <a:p>
+              <a:pPr algn="ctr"/>
+              <a:r>
+                <a:rPr lang="de-DE" sz="1400" dirty="0">
+                  <a:solidFill>
+                    <a:schemeClr val="bg1"/>
+                  </a:solidFill>
+                </a:rPr>
+                <a:t>Simon</a:t>
+              </a:r>
+            </a:p>
+            <a:p>
+              <a:pPr algn="ctr"/>
+              <a:r>
+                <a:rPr lang="de-DE" sz="1400" dirty="0">
+                  <a:solidFill>
+                    <a:schemeClr val="bg1"/>
+                  </a:solidFill>
+                </a:rPr>
+                <a:t>Bastian</a:t>
+              </a:r>
+            </a:p>
+          </p:txBody>
+        </p:sp>
+      </p:grpSp>
+      <p:grpSp>
+        <p:nvGrpSpPr>
+          <p:cNvPr id="42" name="Gruppieren 41">
+            <a:extLst>
+              <a:ext uri="{FF2B5EF4-FFF2-40B4-BE49-F238E27FC236}">
+                <a16:creationId xmlns:a16="http://schemas.microsoft.com/office/drawing/2014/main" id="{218EE356-DA9D-B324-2C5D-CDF2D1BE5286}"/>
+              </a:ext>
+            </a:extLst>
+          </p:cNvPr>
+          <p:cNvGrpSpPr/>
+          <p:nvPr/>
+        </p:nvGrpSpPr>
+        <p:grpSpPr>
+          <a:xfrm>
+            <a:off x="5262542" y="2705536"/>
+            <a:ext cx="1634066" cy="781853"/>
+            <a:chOff x="762001" y="676655"/>
+            <a:chExt cx="1634066" cy="781853"/>
+          </a:xfrm>
+        </p:grpSpPr>
+        <p:grpSp>
+          <p:nvGrpSpPr>
+            <p:cNvPr id="43" name="Gruppieren 42">
+              <a:extLst>
+                <a:ext uri="{FF2B5EF4-FFF2-40B4-BE49-F238E27FC236}">
+                  <a16:creationId xmlns:a16="http://schemas.microsoft.com/office/drawing/2014/main" id="{FF092F51-D19B-638B-8F05-BEEAE96547D2}"/>
+                </a:ext>
+              </a:extLst>
+            </p:cNvPr>
+            <p:cNvGrpSpPr/>
+            <p:nvPr/>
+          </p:nvGrpSpPr>
+          <p:grpSpPr>
+            <a:xfrm>
+              <a:off x="762001" y="676655"/>
+              <a:ext cx="1634066" cy="781853"/>
+              <a:chOff x="677333" y="569114"/>
+              <a:chExt cx="1634067" cy="681160"/>
+            </a:xfrm>
+            <a:solidFill>
+              <a:schemeClr val="tx2">
+                <a:lumMod val="75000"/>
+                <a:lumOff val="25000"/>
+              </a:schemeClr>
+            </a:solidFill>
+          </p:grpSpPr>
+          <p:sp>
+            <p:nvSpPr>
+              <p:cNvPr id="45" name="Rechteck 44">
+                <a:extLst>
+                  <a:ext uri="{FF2B5EF4-FFF2-40B4-BE49-F238E27FC236}">
+                    <a16:creationId xmlns:a16="http://schemas.microsoft.com/office/drawing/2014/main" id="{DE114530-50B0-2904-E8C6-3231515276C0}"/>
+                  </a:ext>
+                </a:extLst>
+              </p:cNvPr>
+              <p:cNvSpPr/>
+              <p:nvPr/>
+            </p:nvSpPr>
+            <p:spPr>
+              <a:xfrm>
+                <a:off x="677333" y="643467"/>
+                <a:ext cx="1634067" cy="606807"/>
+              </a:xfrm>
+              <a:prstGeom prst="rect">
+                <a:avLst/>
+              </a:prstGeom>
+              <a:grpFill/>
+            </p:spPr>
+            <p:style>
+              <a:lnRef idx="2">
+                <a:schemeClr val="accent1">
+                  <a:shade val="15000"/>
+                </a:schemeClr>
+              </a:lnRef>
+              <a:fillRef idx="1">
+                <a:schemeClr val="accent1"/>
+              </a:fillRef>
+              <a:effectRef idx="0">
+                <a:schemeClr val="accent1"/>
+              </a:effectRef>
+              <a:fontRef idx="minor">
+                <a:schemeClr val="lt1"/>
+              </a:fontRef>
+            </p:style>
+            <p:txBody>
+              <a:bodyPr rtlCol="0" anchor="ctr"/>
+              <a:lstStyle/>
+              <a:p>
+                <a:pPr algn="ctr"/>
+                <a:endParaRPr lang="de-DE" dirty="0"/>
+              </a:p>
+            </p:txBody>
+          </p:sp>
+          <p:sp>
+            <p:nvSpPr>
+              <p:cNvPr id="46" name="Rechteck 45">
+                <a:extLst>
+                  <a:ext uri="{FF2B5EF4-FFF2-40B4-BE49-F238E27FC236}">
+                    <a16:creationId xmlns:a16="http://schemas.microsoft.com/office/drawing/2014/main" id="{4B31CBC2-F834-195E-338C-3025B1B74DE2}"/>
+                  </a:ext>
+                </a:extLst>
+              </p:cNvPr>
+              <p:cNvSpPr/>
+              <p:nvPr/>
+            </p:nvSpPr>
+            <p:spPr>
+              <a:xfrm>
+                <a:off x="677333" y="569114"/>
+                <a:ext cx="1634067" cy="413020"/>
+              </a:xfrm>
+              <a:prstGeom prst="rect">
+                <a:avLst/>
+              </a:prstGeom>
+              <a:grpFill/>
+              <a:effectLst/>
+            </p:spPr>
+            <p:style>
+              <a:lnRef idx="2">
+                <a:schemeClr val="accent1">
+                  <a:shade val="15000"/>
+                </a:schemeClr>
+              </a:lnRef>
+              <a:fillRef idx="1">
+                <a:schemeClr val="accent1"/>
+              </a:fillRef>
+              <a:effectRef idx="0">
+                <a:schemeClr val="accent1"/>
+              </a:effectRef>
+              <a:fontRef idx="minor">
+                <a:schemeClr val="lt1"/>
+              </a:fontRef>
+            </p:style>
+            <p:txBody>
+              <a:bodyPr rtlCol="0" anchor="ctr"/>
+              <a:lstStyle/>
+              <a:p>
+                <a:pPr algn="ctr"/>
+                <a:r>
+                  <a:rPr lang="de-DE" sz="1200" b="1" dirty="0"/>
+                  <a:t>Create Class </a:t>
+                </a:r>
+                <a:r>
+                  <a:rPr lang="de-DE" sz="1200" b="1" dirty="0" err="1"/>
+                  <a:t>Diagram</a:t>
+                </a:r>
+                <a:endParaRPr lang="de-DE" sz="1200" b="1" dirty="0"/>
+              </a:p>
+            </p:txBody>
+          </p:sp>
+        </p:grpSp>
+        <p:sp>
+          <p:nvSpPr>
+            <p:cNvPr id="44" name="Textfeld 43">
+              <a:extLst>
+                <a:ext uri="{FF2B5EF4-FFF2-40B4-BE49-F238E27FC236}">
+                  <a16:creationId xmlns:a16="http://schemas.microsoft.com/office/drawing/2014/main" id="{87C571A0-F854-2DE8-F85B-39DDCBEC5940}"/>
+                </a:ext>
+              </a:extLst>
+            </p:cNvPr>
+            <p:cNvSpPr txBox="1"/>
+            <p:nvPr/>
+          </p:nvSpPr>
+          <p:spPr>
+            <a:xfrm>
+              <a:off x="1088136" y="1150731"/>
+              <a:ext cx="987552" cy="307777"/>
+            </a:xfrm>
+            <a:prstGeom prst="rect">
+              <a:avLst/>
+            </a:prstGeom>
+            <a:noFill/>
+          </p:spPr>
+          <p:txBody>
+            <a:bodyPr wrap="square" rtlCol="0">
+              <a:spAutoFit/>
+            </a:bodyPr>
+            <a:lstStyle/>
+            <a:p>
+              <a:pPr algn="ctr"/>
+              <a:r>
+                <a:rPr lang="de-DE" sz="1400" dirty="0">
+                  <a:solidFill>
+                    <a:schemeClr val="bg1"/>
+                  </a:solidFill>
+                </a:rPr>
+                <a:t>Simon</a:t>
+              </a:r>
+            </a:p>
+          </p:txBody>
+        </p:sp>
+      </p:grpSp>
+      <p:grpSp>
+        <p:nvGrpSpPr>
+          <p:cNvPr id="47" name="Gruppieren 46">
+            <a:extLst>
+              <a:ext uri="{FF2B5EF4-FFF2-40B4-BE49-F238E27FC236}">
+                <a16:creationId xmlns:a16="http://schemas.microsoft.com/office/drawing/2014/main" id="{D04E527C-1ABD-987E-5513-BA00D6087B26}"/>
+              </a:ext>
+            </a:extLst>
+          </p:cNvPr>
+          <p:cNvGrpSpPr/>
+          <p:nvPr/>
+        </p:nvGrpSpPr>
+        <p:grpSpPr>
+          <a:xfrm>
+            <a:off x="7546341" y="1327156"/>
+            <a:ext cx="1634066" cy="781853"/>
+            <a:chOff x="3031067" y="547226"/>
+            <a:chExt cx="1634066" cy="781853"/>
+          </a:xfrm>
+        </p:grpSpPr>
+        <p:grpSp>
+          <p:nvGrpSpPr>
+            <p:cNvPr id="48" name="Gruppieren 47">
+              <a:extLst>
+                <a:ext uri="{FF2B5EF4-FFF2-40B4-BE49-F238E27FC236}">
+                  <a16:creationId xmlns:a16="http://schemas.microsoft.com/office/drawing/2014/main" id="{5A436EAF-04A9-0AAA-963B-8A20AAA7954F}"/>
+                </a:ext>
+              </a:extLst>
+            </p:cNvPr>
+            <p:cNvGrpSpPr/>
+            <p:nvPr/>
+          </p:nvGrpSpPr>
+          <p:grpSpPr>
+            <a:xfrm>
+              <a:off x="3031067" y="547226"/>
+              <a:ext cx="1634066" cy="781853"/>
+              <a:chOff x="677333" y="569114"/>
+              <a:chExt cx="1634067" cy="681160"/>
+            </a:xfrm>
+            <a:solidFill>
+              <a:schemeClr val="tx2">
+                <a:lumMod val="75000"/>
+                <a:lumOff val="25000"/>
+              </a:schemeClr>
+            </a:solidFill>
+          </p:grpSpPr>
+          <p:sp>
+            <p:nvSpPr>
+              <p:cNvPr id="50" name="Rechteck 49">
+                <a:extLst>
+                  <a:ext uri="{FF2B5EF4-FFF2-40B4-BE49-F238E27FC236}">
+                    <a16:creationId xmlns:a16="http://schemas.microsoft.com/office/drawing/2014/main" id="{AC07FCBD-248F-1729-6C18-7929C29E41F8}"/>
+                  </a:ext>
+                </a:extLst>
+              </p:cNvPr>
+              <p:cNvSpPr/>
+              <p:nvPr/>
+            </p:nvSpPr>
+            <p:spPr>
+              <a:xfrm>
+                <a:off x="677333" y="643467"/>
+                <a:ext cx="1634067" cy="606807"/>
+              </a:xfrm>
+              <a:prstGeom prst="rect">
+                <a:avLst/>
+              </a:prstGeom>
+              <a:grpFill/>
+            </p:spPr>
+            <p:style>
+              <a:lnRef idx="2">
+                <a:schemeClr val="accent1">
+                  <a:shade val="15000"/>
+                </a:schemeClr>
+              </a:lnRef>
+              <a:fillRef idx="1">
+                <a:schemeClr val="accent1"/>
+              </a:fillRef>
+              <a:effectRef idx="0">
+                <a:schemeClr val="accent1"/>
+              </a:effectRef>
+              <a:fontRef idx="minor">
+                <a:schemeClr val="lt1"/>
+              </a:fontRef>
+            </p:style>
+            <p:txBody>
+              <a:bodyPr rtlCol="0" anchor="ctr"/>
+              <a:lstStyle/>
+              <a:p>
+                <a:pPr algn="ctr"/>
+                <a:endParaRPr lang="de-DE" dirty="0"/>
+              </a:p>
+            </p:txBody>
+          </p:sp>
+          <p:sp>
+            <p:nvSpPr>
+              <p:cNvPr id="51" name="Rechteck 50">
+                <a:extLst>
+                  <a:ext uri="{FF2B5EF4-FFF2-40B4-BE49-F238E27FC236}">
+                    <a16:creationId xmlns:a16="http://schemas.microsoft.com/office/drawing/2014/main" id="{3A556BB7-554F-5749-CEF2-9D622F19E323}"/>
+                  </a:ext>
+                </a:extLst>
+              </p:cNvPr>
+              <p:cNvSpPr/>
+              <p:nvPr/>
+            </p:nvSpPr>
+            <p:spPr>
+              <a:xfrm>
+                <a:off x="677333" y="569114"/>
+                <a:ext cx="1634067" cy="413020"/>
+              </a:xfrm>
+              <a:prstGeom prst="rect">
+                <a:avLst/>
+              </a:prstGeom>
+              <a:grpFill/>
+              <a:effectLst/>
+            </p:spPr>
+            <p:style>
+              <a:lnRef idx="2">
+                <a:schemeClr val="accent1">
+                  <a:shade val="15000"/>
+                </a:schemeClr>
+              </a:lnRef>
+              <a:fillRef idx="1">
+                <a:schemeClr val="accent1"/>
+              </a:fillRef>
+              <a:effectRef idx="0">
+                <a:schemeClr val="accent1"/>
+              </a:effectRef>
+              <a:fontRef idx="minor">
+                <a:schemeClr val="lt1"/>
+              </a:fontRef>
+            </p:style>
+            <p:txBody>
+              <a:bodyPr rtlCol="0" anchor="ctr"/>
+              <a:lstStyle/>
+              <a:p>
+                <a:pPr algn="ctr"/>
+                <a:r>
+                  <a:rPr lang="de-DE" sz="1200" b="1" dirty="0"/>
+                  <a:t>Data </a:t>
+                </a:r>
+                <a:r>
+                  <a:rPr lang="de-DE" sz="1200" b="1" dirty="0" err="1"/>
+                  <a:t>Loading</a:t>
+                </a:r>
+                <a:r>
+                  <a:rPr lang="de-DE" sz="1200" b="1" dirty="0"/>
+                  <a:t> and Python Data Classes</a:t>
+                </a:r>
+              </a:p>
+            </p:txBody>
+          </p:sp>
+        </p:grpSp>
+        <p:sp>
+          <p:nvSpPr>
+            <p:cNvPr id="49" name="Textfeld 48">
+              <a:extLst>
+                <a:ext uri="{FF2B5EF4-FFF2-40B4-BE49-F238E27FC236}">
+                  <a16:creationId xmlns:a16="http://schemas.microsoft.com/office/drawing/2014/main" id="{54C1040E-B5CD-0EFF-CFA0-985F9D117DCD}"/>
+                </a:ext>
+              </a:extLst>
+            </p:cNvPr>
+            <p:cNvSpPr txBox="1"/>
+            <p:nvPr/>
+          </p:nvSpPr>
+          <p:spPr>
+            <a:xfrm>
+              <a:off x="3357202" y="1021302"/>
+              <a:ext cx="987552" cy="307777"/>
+            </a:xfrm>
+            <a:prstGeom prst="rect">
+              <a:avLst/>
+            </a:prstGeom>
+            <a:noFill/>
+          </p:spPr>
+          <p:txBody>
+            <a:bodyPr wrap="square" rtlCol="0">
+              <a:spAutoFit/>
+            </a:bodyPr>
+            <a:lstStyle/>
+            <a:p>
+              <a:pPr algn="ctr"/>
+              <a:r>
+                <a:rPr lang="de-DE" sz="1400" dirty="0">
+                  <a:solidFill>
+                    <a:schemeClr val="bg1"/>
+                  </a:solidFill>
+                </a:rPr>
+                <a:t>Simon</a:t>
+              </a:r>
+            </a:p>
+          </p:txBody>
+        </p:sp>
+      </p:grpSp>
+      <p:grpSp>
+        <p:nvGrpSpPr>
+          <p:cNvPr id="52" name="Gruppieren 51">
+            <a:extLst>
+              <a:ext uri="{FF2B5EF4-FFF2-40B4-BE49-F238E27FC236}">
+                <a16:creationId xmlns:a16="http://schemas.microsoft.com/office/drawing/2014/main" id="{63F32650-399A-C5CC-1082-4247C4C88F44}"/>
+              </a:ext>
+            </a:extLst>
+          </p:cNvPr>
+          <p:cNvGrpSpPr/>
+          <p:nvPr/>
+        </p:nvGrpSpPr>
+        <p:grpSpPr>
+          <a:xfrm>
+            <a:off x="7546340" y="2214000"/>
+            <a:ext cx="1634066" cy="781853"/>
+            <a:chOff x="3031067" y="547226"/>
+            <a:chExt cx="1634066" cy="781853"/>
+          </a:xfrm>
+        </p:grpSpPr>
+        <p:grpSp>
+          <p:nvGrpSpPr>
+            <p:cNvPr id="53" name="Gruppieren 52">
+              <a:extLst>
+                <a:ext uri="{FF2B5EF4-FFF2-40B4-BE49-F238E27FC236}">
+                  <a16:creationId xmlns:a16="http://schemas.microsoft.com/office/drawing/2014/main" id="{67F4F30E-C225-A45C-5C60-51AEC6F5D663}"/>
+                </a:ext>
+              </a:extLst>
+            </p:cNvPr>
+            <p:cNvGrpSpPr/>
+            <p:nvPr/>
+          </p:nvGrpSpPr>
+          <p:grpSpPr>
+            <a:xfrm>
+              <a:off x="3031067" y="547226"/>
+              <a:ext cx="1634066" cy="781853"/>
+              <a:chOff x="677333" y="569114"/>
+              <a:chExt cx="1634067" cy="681160"/>
+            </a:xfrm>
+            <a:solidFill>
+              <a:schemeClr val="tx2">
+                <a:lumMod val="75000"/>
+                <a:lumOff val="25000"/>
+              </a:schemeClr>
+            </a:solidFill>
+          </p:grpSpPr>
+          <p:sp>
+            <p:nvSpPr>
+              <p:cNvPr id="55" name="Rechteck 54">
+                <a:extLst>
+                  <a:ext uri="{FF2B5EF4-FFF2-40B4-BE49-F238E27FC236}">
+                    <a16:creationId xmlns:a16="http://schemas.microsoft.com/office/drawing/2014/main" id="{B16AA48A-4280-FBC3-D2A2-E69219E10F08}"/>
+                  </a:ext>
+                </a:extLst>
+              </p:cNvPr>
+              <p:cNvSpPr/>
+              <p:nvPr/>
+            </p:nvSpPr>
+            <p:spPr>
+              <a:xfrm>
+                <a:off x="677333" y="643467"/>
+                <a:ext cx="1634067" cy="606807"/>
+              </a:xfrm>
+              <a:prstGeom prst="rect">
+                <a:avLst/>
+              </a:prstGeom>
+              <a:grpFill/>
+            </p:spPr>
+            <p:style>
+              <a:lnRef idx="2">
+                <a:schemeClr val="accent1">
+                  <a:shade val="15000"/>
+                </a:schemeClr>
+              </a:lnRef>
+              <a:fillRef idx="1">
+                <a:schemeClr val="accent1"/>
+              </a:fillRef>
+              <a:effectRef idx="0">
+                <a:schemeClr val="accent1"/>
+              </a:effectRef>
+              <a:fontRef idx="minor">
+                <a:schemeClr val="lt1"/>
+              </a:fontRef>
+            </p:style>
+            <p:txBody>
+              <a:bodyPr rtlCol="0" anchor="ctr"/>
+              <a:lstStyle/>
+              <a:p>
+                <a:pPr algn="ctr"/>
+                <a:endParaRPr lang="de-DE" dirty="0"/>
+              </a:p>
+            </p:txBody>
+          </p:sp>
+          <p:sp>
+            <p:nvSpPr>
+              <p:cNvPr id="56" name="Rechteck 55">
+                <a:extLst>
+                  <a:ext uri="{FF2B5EF4-FFF2-40B4-BE49-F238E27FC236}">
+                    <a16:creationId xmlns:a16="http://schemas.microsoft.com/office/drawing/2014/main" id="{7560F5C2-A91C-ECD6-39B8-93BBCB74C2E9}"/>
+                  </a:ext>
+                </a:extLst>
+              </p:cNvPr>
+              <p:cNvSpPr/>
+              <p:nvPr/>
+            </p:nvSpPr>
+            <p:spPr>
+              <a:xfrm>
+                <a:off x="677333" y="569114"/>
+                <a:ext cx="1634067" cy="413020"/>
+              </a:xfrm>
+              <a:prstGeom prst="rect">
+                <a:avLst/>
+              </a:prstGeom>
+              <a:grpFill/>
+              <a:effectLst/>
+            </p:spPr>
+            <p:style>
+              <a:lnRef idx="2">
+                <a:schemeClr val="accent1">
+                  <a:shade val="15000"/>
+                </a:schemeClr>
+              </a:lnRef>
+              <a:fillRef idx="1">
+                <a:schemeClr val="accent1"/>
+              </a:fillRef>
+              <a:effectRef idx="0">
+                <a:schemeClr val="accent1"/>
+              </a:effectRef>
+              <a:fontRef idx="minor">
+                <a:schemeClr val="lt1"/>
+              </a:fontRef>
+            </p:style>
+            <p:txBody>
+              <a:bodyPr rtlCol="0" anchor="ctr"/>
+              <a:lstStyle/>
+              <a:p>
+                <a:pPr algn="ctr"/>
+                <a:r>
+                  <a:rPr lang="de-DE" sz="1200" b="1" dirty="0"/>
+                  <a:t>Load and </a:t>
+                </a:r>
+                <a:r>
+                  <a:rPr lang="de-DE" sz="1200" b="1" dirty="0" err="1"/>
+                  <a:t>Verify</a:t>
+                </a:r>
+                <a:r>
+                  <a:rPr lang="de-DE" sz="1200" b="1" dirty="0"/>
+                  <a:t> </a:t>
+                </a:r>
+                <a:r>
+                  <a:rPr lang="de-DE" sz="1200" b="1" dirty="0" err="1"/>
+                  <a:t>Grid</a:t>
+                </a:r>
+                <a:r>
+                  <a:rPr lang="de-DE" sz="1200" b="1" dirty="0"/>
+                  <a:t> Data</a:t>
+                </a:r>
+              </a:p>
+            </p:txBody>
+          </p:sp>
+        </p:grpSp>
+        <p:sp>
+          <p:nvSpPr>
+            <p:cNvPr id="54" name="Textfeld 53">
+              <a:extLst>
+                <a:ext uri="{FF2B5EF4-FFF2-40B4-BE49-F238E27FC236}">
+                  <a16:creationId xmlns:a16="http://schemas.microsoft.com/office/drawing/2014/main" id="{670370E0-AE18-7E7D-F3EE-98FD86B42B8F}"/>
+                </a:ext>
+              </a:extLst>
+            </p:cNvPr>
+            <p:cNvSpPr txBox="1"/>
+            <p:nvPr/>
+          </p:nvSpPr>
+          <p:spPr>
+            <a:xfrm>
+              <a:off x="3357202" y="1021302"/>
+              <a:ext cx="987552" cy="307777"/>
+            </a:xfrm>
+            <a:prstGeom prst="rect">
+              <a:avLst/>
+            </a:prstGeom>
+            <a:noFill/>
+          </p:spPr>
+          <p:txBody>
+            <a:bodyPr wrap="square" rtlCol="0">
+              <a:spAutoFit/>
+            </a:bodyPr>
+            <a:lstStyle/>
+            <a:p>
+              <a:pPr algn="ctr"/>
+              <a:r>
+                <a:rPr lang="de-DE" sz="1400" dirty="0">
+                  <a:solidFill>
+                    <a:schemeClr val="bg1"/>
+                  </a:solidFill>
+                </a:rPr>
+                <a:t>Bastian</a:t>
+              </a:r>
+            </a:p>
+          </p:txBody>
+        </p:sp>
+      </p:grpSp>
+      <p:grpSp>
+        <p:nvGrpSpPr>
+          <p:cNvPr id="57" name="Gruppieren 56">
+            <a:extLst>
+              <a:ext uri="{FF2B5EF4-FFF2-40B4-BE49-F238E27FC236}">
+                <a16:creationId xmlns:a16="http://schemas.microsoft.com/office/drawing/2014/main" id="{6E714AD9-C800-BADD-DB3D-E039FC9F287B}"/>
+              </a:ext>
+            </a:extLst>
+          </p:cNvPr>
+          <p:cNvGrpSpPr/>
+          <p:nvPr/>
+        </p:nvGrpSpPr>
+        <p:grpSpPr>
+          <a:xfrm>
+            <a:off x="7546340" y="3085060"/>
+            <a:ext cx="1634066" cy="997296"/>
+            <a:chOff x="3031067" y="547226"/>
+            <a:chExt cx="1634066" cy="997296"/>
+          </a:xfrm>
+        </p:grpSpPr>
+        <p:grpSp>
+          <p:nvGrpSpPr>
+            <p:cNvPr id="58" name="Gruppieren 57">
+              <a:extLst>
+                <a:ext uri="{FF2B5EF4-FFF2-40B4-BE49-F238E27FC236}">
+                  <a16:creationId xmlns:a16="http://schemas.microsoft.com/office/drawing/2014/main" id="{21318579-B405-051E-0F40-C88309BB0440}"/>
+                </a:ext>
+              </a:extLst>
+            </p:cNvPr>
+            <p:cNvGrpSpPr/>
+            <p:nvPr/>
+          </p:nvGrpSpPr>
+          <p:grpSpPr>
+            <a:xfrm>
+              <a:off x="3031067" y="547226"/>
+              <a:ext cx="1634066" cy="997296"/>
+              <a:chOff x="677333" y="569114"/>
+              <a:chExt cx="1634067" cy="868857"/>
+            </a:xfrm>
+            <a:solidFill>
+              <a:schemeClr val="tx2">
+                <a:lumMod val="75000"/>
+                <a:lumOff val="25000"/>
+              </a:schemeClr>
+            </a:solidFill>
+          </p:grpSpPr>
+          <p:sp>
+            <p:nvSpPr>
+              <p:cNvPr id="60" name="Rechteck 59">
+                <a:extLst>
+                  <a:ext uri="{FF2B5EF4-FFF2-40B4-BE49-F238E27FC236}">
+                    <a16:creationId xmlns:a16="http://schemas.microsoft.com/office/drawing/2014/main" id="{FE76AC27-9EA5-434A-4230-3C3E041E9966}"/>
+                  </a:ext>
+                </a:extLst>
+              </p:cNvPr>
+              <p:cNvSpPr/>
+              <p:nvPr/>
+            </p:nvSpPr>
+            <p:spPr>
+              <a:xfrm>
+                <a:off x="677333" y="643467"/>
+                <a:ext cx="1634067" cy="794504"/>
+              </a:xfrm>
+              <a:prstGeom prst="rect">
+                <a:avLst/>
+              </a:prstGeom>
+              <a:grpFill/>
+            </p:spPr>
+            <p:style>
+              <a:lnRef idx="2">
+                <a:schemeClr val="accent1">
+                  <a:shade val="15000"/>
+                </a:schemeClr>
+              </a:lnRef>
+              <a:fillRef idx="1">
+                <a:schemeClr val="accent1"/>
+              </a:fillRef>
+              <a:effectRef idx="0">
+                <a:schemeClr val="accent1"/>
+              </a:effectRef>
+              <a:fontRef idx="minor">
+                <a:schemeClr val="lt1"/>
+              </a:fontRef>
+            </p:style>
+            <p:txBody>
+              <a:bodyPr rtlCol="0" anchor="ctr"/>
+              <a:lstStyle/>
+              <a:p>
+                <a:pPr algn="ctr"/>
+                <a:endParaRPr lang="de-DE" dirty="0"/>
+              </a:p>
+            </p:txBody>
+          </p:sp>
+          <p:sp>
+            <p:nvSpPr>
+              <p:cNvPr id="61" name="Rechteck 60">
+                <a:extLst>
+                  <a:ext uri="{FF2B5EF4-FFF2-40B4-BE49-F238E27FC236}">
+                    <a16:creationId xmlns:a16="http://schemas.microsoft.com/office/drawing/2014/main" id="{BE2E4AC0-7C03-CFDA-6594-DB99EE2FE9D8}"/>
+                  </a:ext>
+                </a:extLst>
+              </p:cNvPr>
+              <p:cNvSpPr/>
+              <p:nvPr/>
+            </p:nvSpPr>
+            <p:spPr>
+              <a:xfrm>
+                <a:off x="677333" y="569114"/>
+                <a:ext cx="1634067" cy="413020"/>
+              </a:xfrm>
+              <a:prstGeom prst="rect">
+                <a:avLst/>
+              </a:prstGeom>
+              <a:grpFill/>
+              <a:effectLst/>
+            </p:spPr>
+            <p:style>
+              <a:lnRef idx="2">
+                <a:schemeClr val="accent1">
+                  <a:shade val="15000"/>
+                </a:schemeClr>
+              </a:lnRef>
+              <a:fillRef idx="1">
+                <a:schemeClr val="accent1"/>
+              </a:fillRef>
+              <a:effectRef idx="0">
+                <a:schemeClr val="accent1"/>
+              </a:effectRef>
+              <a:fontRef idx="minor">
+                <a:schemeClr val="lt1"/>
+              </a:fontRef>
+            </p:style>
+            <p:txBody>
+              <a:bodyPr rtlCol="0" anchor="ctr"/>
+              <a:lstStyle/>
+              <a:p>
+                <a:pPr algn="ctr"/>
+                <a:r>
+                  <a:rPr lang="de-DE" sz="1200" b="1" dirty="0"/>
+                  <a:t>Main Simulation Engine </a:t>
+                </a:r>
+              </a:p>
+            </p:txBody>
+          </p:sp>
+        </p:grpSp>
+        <p:sp>
+          <p:nvSpPr>
+            <p:cNvPr id="59" name="Textfeld 58">
+              <a:extLst>
+                <a:ext uri="{FF2B5EF4-FFF2-40B4-BE49-F238E27FC236}">
+                  <a16:creationId xmlns:a16="http://schemas.microsoft.com/office/drawing/2014/main" id="{7CD13AC0-6D85-5BFC-E507-BC70C23E7D9F}"/>
+                </a:ext>
+              </a:extLst>
+            </p:cNvPr>
+            <p:cNvSpPr txBox="1"/>
+            <p:nvPr/>
+          </p:nvSpPr>
+          <p:spPr>
+            <a:xfrm>
+              <a:off x="3357202" y="1021302"/>
+              <a:ext cx="987552" cy="523220"/>
+            </a:xfrm>
+            <a:prstGeom prst="rect">
+              <a:avLst/>
+            </a:prstGeom>
+            <a:noFill/>
+          </p:spPr>
+          <p:txBody>
+            <a:bodyPr wrap="square" rtlCol="0">
+              <a:spAutoFit/>
+            </a:bodyPr>
+            <a:lstStyle/>
+            <a:p>
+              <a:pPr algn="ctr"/>
+              <a:r>
+                <a:rPr lang="de-DE" sz="1400" dirty="0">
+                  <a:solidFill>
+                    <a:schemeClr val="bg1"/>
+                  </a:solidFill>
+                </a:rPr>
+                <a:t>Julian</a:t>
+              </a:r>
+            </a:p>
+            <a:p>
+              <a:pPr algn="ctr"/>
+              <a:r>
+                <a:rPr lang="de-DE" sz="1400" dirty="0">
+                  <a:solidFill>
+                    <a:schemeClr val="bg1"/>
+                  </a:solidFill>
+                </a:rPr>
+                <a:t>Simon</a:t>
+              </a:r>
+            </a:p>
+          </p:txBody>
+        </p:sp>
+      </p:grpSp>
+      <p:grpSp>
+        <p:nvGrpSpPr>
+          <p:cNvPr id="62" name="Gruppieren 61">
+            <a:extLst>
+              <a:ext uri="{FF2B5EF4-FFF2-40B4-BE49-F238E27FC236}">
+                <a16:creationId xmlns:a16="http://schemas.microsoft.com/office/drawing/2014/main" id="{C0AAED61-887B-8312-AB8F-2AE685924817}"/>
+              </a:ext>
+            </a:extLst>
+          </p:cNvPr>
+          <p:cNvGrpSpPr/>
+          <p:nvPr/>
+        </p:nvGrpSpPr>
+        <p:grpSpPr>
+          <a:xfrm>
+            <a:off x="7553072" y="4162281"/>
+            <a:ext cx="1634066" cy="997296"/>
+            <a:chOff x="3031067" y="547226"/>
+            <a:chExt cx="1634066" cy="997296"/>
+          </a:xfrm>
+        </p:grpSpPr>
+        <p:grpSp>
+          <p:nvGrpSpPr>
+            <p:cNvPr id="63" name="Gruppieren 62">
+              <a:extLst>
+                <a:ext uri="{FF2B5EF4-FFF2-40B4-BE49-F238E27FC236}">
+                  <a16:creationId xmlns:a16="http://schemas.microsoft.com/office/drawing/2014/main" id="{7A21683E-1B0C-0783-3678-D5CF1763096D}"/>
+                </a:ext>
+              </a:extLst>
+            </p:cNvPr>
+            <p:cNvGrpSpPr/>
+            <p:nvPr/>
+          </p:nvGrpSpPr>
+          <p:grpSpPr>
+            <a:xfrm>
+              <a:off x="3031067" y="547226"/>
+              <a:ext cx="1634066" cy="997296"/>
+              <a:chOff x="677333" y="569114"/>
+              <a:chExt cx="1634067" cy="868857"/>
+            </a:xfrm>
+            <a:solidFill>
+              <a:schemeClr val="tx2">
+                <a:lumMod val="75000"/>
+                <a:lumOff val="25000"/>
+              </a:schemeClr>
+            </a:solidFill>
+          </p:grpSpPr>
+          <p:sp>
+            <p:nvSpPr>
+              <p:cNvPr id="65" name="Rechteck 64">
+                <a:extLst>
+                  <a:ext uri="{FF2B5EF4-FFF2-40B4-BE49-F238E27FC236}">
+                    <a16:creationId xmlns:a16="http://schemas.microsoft.com/office/drawing/2014/main" id="{15B61436-E31E-6558-F1C6-EB52EFE38339}"/>
+                  </a:ext>
+                </a:extLst>
+              </p:cNvPr>
+              <p:cNvSpPr/>
+              <p:nvPr/>
+            </p:nvSpPr>
+            <p:spPr>
+              <a:xfrm>
+                <a:off x="677333" y="643467"/>
+                <a:ext cx="1634067" cy="794504"/>
+              </a:xfrm>
+              <a:prstGeom prst="rect">
+                <a:avLst/>
+              </a:prstGeom>
+              <a:grpFill/>
+            </p:spPr>
+            <p:style>
+              <a:lnRef idx="2">
+                <a:schemeClr val="accent1">
+                  <a:shade val="15000"/>
+                </a:schemeClr>
+              </a:lnRef>
+              <a:fillRef idx="1">
+                <a:schemeClr val="accent1"/>
+              </a:fillRef>
+              <a:effectRef idx="0">
+                <a:schemeClr val="accent1"/>
+              </a:effectRef>
+              <a:fontRef idx="minor">
+                <a:schemeClr val="lt1"/>
+              </a:fontRef>
+            </p:style>
+            <p:txBody>
+              <a:bodyPr rtlCol="0" anchor="ctr"/>
+              <a:lstStyle/>
+              <a:p>
+                <a:pPr algn="ctr"/>
+                <a:endParaRPr lang="de-DE" dirty="0"/>
+              </a:p>
+            </p:txBody>
+          </p:sp>
+          <p:sp>
+            <p:nvSpPr>
+              <p:cNvPr id="66" name="Rechteck 65">
+                <a:extLst>
+                  <a:ext uri="{FF2B5EF4-FFF2-40B4-BE49-F238E27FC236}">
+                    <a16:creationId xmlns:a16="http://schemas.microsoft.com/office/drawing/2014/main" id="{FB9841B4-1784-8662-534E-C950E4FE2995}"/>
+                  </a:ext>
+                </a:extLst>
+              </p:cNvPr>
+              <p:cNvSpPr/>
+              <p:nvPr/>
+            </p:nvSpPr>
+            <p:spPr>
+              <a:xfrm>
+                <a:off x="677333" y="569114"/>
+                <a:ext cx="1634067" cy="413020"/>
+              </a:xfrm>
+              <a:prstGeom prst="rect">
+                <a:avLst/>
+              </a:prstGeom>
+              <a:grpFill/>
+              <a:effectLst/>
+            </p:spPr>
+            <p:style>
+              <a:lnRef idx="2">
+                <a:schemeClr val="accent1">
+                  <a:shade val="15000"/>
+                </a:schemeClr>
+              </a:lnRef>
+              <a:fillRef idx="1">
+                <a:schemeClr val="accent1"/>
+              </a:fillRef>
+              <a:effectRef idx="0">
+                <a:schemeClr val="accent1"/>
+              </a:effectRef>
+              <a:fontRef idx="minor">
+                <a:schemeClr val="lt1"/>
+              </a:fontRef>
+            </p:style>
+            <p:txBody>
+              <a:bodyPr rtlCol="0" anchor="ctr"/>
+              <a:lstStyle/>
+              <a:p>
+                <a:pPr algn="ctr"/>
+                <a:r>
+                  <a:rPr lang="de-DE" sz="1200" b="1" dirty="0"/>
+                  <a:t>Policy Interface and </a:t>
+                </a:r>
+                <a:r>
+                  <a:rPr lang="de-DE" sz="1200" b="1" dirty="0" err="1"/>
+                  <a:t>Logic</a:t>
+                </a:r>
+                <a:endParaRPr lang="de-DE" sz="1200" b="1" dirty="0"/>
+              </a:p>
+            </p:txBody>
+          </p:sp>
+        </p:grpSp>
+        <p:sp>
+          <p:nvSpPr>
+            <p:cNvPr id="64" name="Textfeld 63">
+              <a:extLst>
+                <a:ext uri="{FF2B5EF4-FFF2-40B4-BE49-F238E27FC236}">
+                  <a16:creationId xmlns:a16="http://schemas.microsoft.com/office/drawing/2014/main" id="{5FD57500-0E6B-FDD4-F138-AD32F6C7E225}"/>
+                </a:ext>
+              </a:extLst>
+            </p:cNvPr>
+            <p:cNvSpPr txBox="1"/>
+            <p:nvPr/>
+          </p:nvSpPr>
+          <p:spPr>
+            <a:xfrm>
+              <a:off x="3357202" y="1021302"/>
+              <a:ext cx="987552" cy="523220"/>
+            </a:xfrm>
+            <a:prstGeom prst="rect">
+              <a:avLst/>
+            </a:prstGeom>
+            <a:noFill/>
+          </p:spPr>
+          <p:txBody>
+            <a:bodyPr wrap="square" rtlCol="0">
+              <a:spAutoFit/>
+            </a:bodyPr>
+            <a:lstStyle/>
+            <a:p>
+              <a:pPr algn="ctr"/>
+              <a:r>
+                <a:rPr lang="de-DE" sz="1400" dirty="0">
+                  <a:solidFill>
+                    <a:schemeClr val="bg1"/>
+                  </a:solidFill>
+                </a:rPr>
+                <a:t>Julian</a:t>
+              </a:r>
+            </a:p>
+            <a:p>
+              <a:pPr algn="ctr"/>
+              <a:r>
+                <a:rPr lang="de-DE" sz="1400" dirty="0">
+                  <a:solidFill>
+                    <a:schemeClr val="bg1"/>
+                  </a:solidFill>
+                </a:rPr>
+                <a:t>Bastian</a:t>
+              </a:r>
+            </a:p>
+          </p:txBody>
+        </p:sp>
+      </p:grpSp>
+      <p:grpSp>
+        <p:nvGrpSpPr>
+          <p:cNvPr id="72" name="Gruppieren 71">
+            <a:extLst>
+              <a:ext uri="{FF2B5EF4-FFF2-40B4-BE49-F238E27FC236}">
+                <a16:creationId xmlns:a16="http://schemas.microsoft.com/office/drawing/2014/main" id="{3BE0A6ED-3255-F904-EC1F-BE3CE5798312}"/>
+              </a:ext>
+            </a:extLst>
+          </p:cNvPr>
+          <p:cNvGrpSpPr/>
+          <p:nvPr/>
+        </p:nvGrpSpPr>
+        <p:grpSpPr>
+          <a:xfrm>
+            <a:off x="7546340" y="5248783"/>
+            <a:ext cx="1634066" cy="781853"/>
+            <a:chOff x="762001" y="676655"/>
+            <a:chExt cx="1634066" cy="781853"/>
+          </a:xfrm>
+        </p:grpSpPr>
+        <p:grpSp>
+          <p:nvGrpSpPr>
+            <p:cNvPr id="73" name="Gruppieren 72">
+              <a:extLst>
+                <a:ext uri="{FF2B5EF4-FFF2-40B4-BE49-F238E27FC236}">
+                  <a16:creationId xmlns:a16="http://schemas.microsoft.com/office/drawing/2014/main" id="{325047D7-9F15-1648-92C8-3AD013BA4B0E}"/>
+                </a:ext>
+              </a:extLst>
+            </p:cNvPr>
+            <p:cNvGrpSpPr/>
+            <p:nvPr/>
+          </p:nvGrpSpPr>
+          <p:grpSpPr>
+            <a:xfrm>
+              <a:off x="762001" y="676655"/>
+              <a:ext cx="1634066" cy="781853"/>
+              <a:chOff x="677333" y="569114"/>
+              <a:chExt cx="1634067" cy="681160"/>
+            </a:xfrm>
+            <a:solidFill>
+              <a:schemeClr val="tx2">
+                <a:lumMod val="75000"/>
+                <a:lumOff val="25000"/>
+              </a:schemeClr>
+            </a:solidFill>
+          </p:grpSpPr>
+          <p:sp>
+            <p:nvSpPr>
+              <p:cNvPr id="75" name="Rechteck 74">
+                <a:extLst>
+                  <a:ext uri="{FF2B5EF4-FFF2-40B4-BE49-F238E27FC236}">
+                    <a16:creationId xmlns:a16="http://schemas.microsoft.com/office/drawing/2014/main" id="{2F76C2F5-4767-006D-CB4B-6C0C227A5417}"/>
+                  </a:ext>
+                </a:extLst>
+              </p:cNvPr>
+              <p:cNvSpPr/>
+              <p:nvPr/>
+            </p:nvSpPr>
+            <p:spPr>
+              <a:xfrm>
+                <a:off x="677333" y="643467"/>
+                <a:ext cx="1634067" cy="606807"/>
+              </a:xfrm>
+              <a:prstGeom prst="rect">
+                <a:avLst/>
+              </a:prstGeom>
+              <a:grpFill/>
+            </p:spPr>
+            <p:style>
+              <a:lnRef idx="2">
+                <a:schemeClr val="accent1">
+                  <a:shade val="15000"/>
+                </a:schemeClr>
+              </a:lnRef>
+              <a:fillRef idx="1">
+                <a:schemeClr val="accent1"/>
+              </a:fillRef>
+              <a:effectRef idx="0">
+                <a:schemeClr val="accent1"/>
+              </a:effectRef>
+              <a:fontRef idx="minor">
+                <a:schemeClr val="lt1"/>
+              </a:fontRef>
+            </p:style>
+            <p:txBody>
+              <a:bodyPr rtlCol="0" anchor="ctr"/>
+              <a:lstStyle/>
+              <a:p>
+                <a:pPr algn="ctr"/>
+                <a:endParaRPr lang="de-DE" dirty="0"/>
+              </a:p>
+            </p:txBody>
+          </p:sp>
+          <p:sp>
+            <p:nvSpPr>
+              <p:cNvPr id="76" name="Rechteck 75">
+                <a:extLst>
+                  <a:ext uri="{FF2B5EF4-FFF2-40B4-BE49-F238E27FC236}">
+                    <a16:creationId xmlns:a16="http://schemas.microsoft.com/office/drawing/2014/main" id="{8485FB1C-5917-08CF-9E01-31E7C436D108}"/>
+                  </a:ext>
+                </a:extLst>
+              </p:cNvPr>
+              <p:cNvSpPr/>
+              <p:nvPr/>
+            </p:nvSpPr>
+            <p:spPr>
+              <a:xfrm>
+                <a:off x="677333" y="569114"/>
+                <a:ext cx="1634067" cy="413020"/>
+              </a:xfrm>
+              <a:prstGeom prst="rect">
+                <a:avLst/>
+              </a:prstGeom>
+              <a:grpFill/>
+              <a:effectLst/>
+            </p:spPr>
+            <p:style>
+              <a:lnRef idx="2">
+                <a:schemeClr val="accent1">
+                  <a:shade val="15000"/>
+                </a:schemeClr>
+              </a:lnRef>
+              <a:fillRef idx="1">
+                <a:schemeClr val="accent1"/>
+              </a:fillRef>
+              <a:effectRef idx="0">
+                <a:schemeClr val="accent1"/>
+              </a:effectRef>
+              <a:fontRef idx="minor">
+                <a:schemeClr val="lt1"/>
+              </a:fontRef>
+            </p:style>
+            <p:txBody>
+              <a:bodyPr rtlCol="0" anchor="ctr"/>
+              <a:lstStyle/>
+              <a:p>
+                <a:pPr algn="ctr"/>
+                <a:r>
+                  <a:rPr lang="de-DE" sz="1200" b="1" dirty="0"/>
+                  <a:t>Implement Output </a:t>
+                </a:r>
+                <a:r>
+                  <a:rPr lang="de-DE" sz="1200" b="1" dirty="0" err="1"/>
+                  <a:t>Statistics</a:t>
+                </a:r>
+                <a:endParaRPr lang="de-DE" sz="1200" b="1" dirty="0"/>
+              </a:p>
+            </p:txBody>
+          </p:sp>
+        </p:grpSp>
+        <p:sp>
+          <p:nvSpPr>
+            <p:cNvPr id="74" name="Textfeld 73">
+              <a:extLst>
+                <a:ext uri="{FF2B5EF4-FFF2-40B4-BE49-F238E27FC236}">
+                  <a16:creationId xmlns:a16="http://schemas.microsoft.com/office/drawing/2014/main" id="{EC226FE3-8FC9-49BE-AADB-DFFE8F7AAA21}"/>
+                </a:ext>
+              </a:extLst>
+            </p:cNvPr>
+            <p:cNvSpPr txBox="1"/>
+            <p:nvPr/>
+          </p:nvSpPr>
+          <p:spPr>
+            <a:xfrm>
+              <a:off x="1088136" y="1150731"/>
+              <a:ext cx="987552" cy="307777"/>
+            </a:xfrm>
+            <a:prstGeom prst="rect">
+              <a:avLst/>
+            </a:prstGeom>
+            <a:noFill/>
+          </p:spPr>
+          <p:txBody>
+            <a:bodyPr wrap="square" rtlCol="0">
+              <a:spAutoFit/>
+            </a:bodyPr>
+            <a:lstStyle/>
+            <a:p>
+              <a:pPr algn="ctr"/>
+              <a:r>
+                <a:rPr lang="de-DE" sz="1400" dirty="0">
+                  <a:solidFill>
+                    <a:schemeClr val="bg1"/>
+                  </a:solidFill>
+                </a:rPr>
+                <a:t>Bastian</a:t>
+              </a:r>
+            </a:p>
+          </p:txBody>
+        </p:sp>
+      </p:grpSp>
+      <p:sp>
+        <p:nvSpPr>
+          <p:cNvPr id="81" name="Rechteck 80">
+            <a:extLst>
+              <a:ext uri="{FF2B5EF4-FFF2-40B4-BE49-F238E27FC236}">
+                <a16:creationId xmlns:a16="http://schemas.microsoft.com/office/drawing/2014/main" id="{2D788A90-5B90-ED59-6F9F-60CC5D0A1AA5}"/>
+              </a:ext>
+            </a:extLst>
+          </p:cNvPr>
+          <p:cNvSpPr/>
+          <p:nvPr/>
+        </p:nvSpPr>
+        <p:spPr>
+          <a:xfrm>
+            <a:off x="9836488" y="1335171"/>
+            <a:ext cx="1634066" cy="474075"/>
+          </a:xfrm>
+          <a:prstGeom prst="rect">
+            <a:avLst/>
+          </a:prstGeom>
+          <a:solidFill>
+            <a:schemeClr val="tx2">
+              <a:lumMod val="75000"/>
+              <a:lumOff val="25000"/>
+            </a:schemeClr>
+          </a:solidFill>
+          <a:effectLst/>
+        </p:spPr>
+        <p:style>
+          <a:lnRef idx="2">
+            <a:schemeClr val="accent1">
+              <a:shade val="15000"/>
+            </a:schemeClr>
+          </a:lnRef>
+          <a:fillRef idx="1">
+            <a:schemeClr val="accent1"/>
+          </a:fillRef>
+          <a:effectRef idx="0">
+            <a:schemeClr val="accent1"/>
+          </a:effectRef>
+          <a:fontRef idx="minor">
+            <a:schemeClr val="lt1"/>
+          </a:fontRef>
+        </p:style>
+        <p:txBody>
+          <a:bodyPr rtlCol="0" anchor="ctr"/>
+          <a:lstStyle/>
+          <a:p>
+            <a:pPr algn="ctr"/>
+            <a:r>
+              <a:rPr lang="de-DE" sz="1200" b="1" dirty="0"/>
+              <a:t>Model Validation</a:t>
+            </a:r>
+          </a:p>
+        </p:txBody>
+      </p:sp>
+      <p:sp>
+        <p:nvSpPr>
+          <p:cNvPr id="86" name="Rechteck 85">
+            <a:extLst>
+              <a:ext uri="{FF2B5EF4-FFF2-40B4-BE49-F238E27FC236}">
+                <a16:creationId xmlns:a16="http://schemas.microsoft.com/office/drawing/2014/main" id="{6B1211B4-CE7B-2BC2-DB16-8A37EB2C9CDC}"/>
+              </a:ext>
+            </a:extLst>
+          </p:cNvPr>
+          <p:cNvSpPr/>
+          <p:nvPr/>
+        </p:nvSpPr>
+        <p:spPr>
+          <a:xfrm>
+            <a:off x="9832169" y="1916158"/>
+            <a:ext cx="1634066" cy="474075"/>
+          </a:xfrm>
+          <a:prstGeom prst="rect">
+            <a:avLst/>
+          </a:prstGeom>
+          <a:solidFill>
+            <a:schemeClr val="tx2">
+              <a:lumMod val="75000"/>
+              <a:lumOff val="25000"/>
+            </a:schemeClr>
+          </a:solidFill>
+          <a:effectLst/>
+        </p:spPr>
+        <p:style>
+          <a:lnRef idx="2">
+            <a:schemeClr val="accent1">
+              <a:shade val="15000"/>
+            </a:schemeClr>
+          </a:lnRef>
+          <a:fillRef idx="1">
+            <a:schemeClr val="accent1"/>
+          </a:fillRef>
+          <a:effectRef idx="0">
+            <a:schemeClr val="accent1"/>
+          </a:effectRef>
+          <a:fontRef idx="minor">
+            <a:schemeClr val="lt1"/>
+          </a:fontRef>
+        </p:style>
+        <p:txBody>
+          <a:bodyPr rtlCol="0" anchor="ctr"/>
+          <a:lstStyle/>
+          <a:p>
+            <a:pPr algn="ctr"/>
+            <a:r>
+              <a:rPr lang="de-DE" sz="1200" b="1" dirty="0"/>
+              <a:t>Pilot Runs</a:t>
+            </a:r>
+          </a:p>
+        </p:txBody>
+      </p:sp>
+      <p:sp>
+        <p:nvSpPr>
+          <p:cNvPr id="91" name="Rechteck 90">
+            <a:extLst>
+              <a:ext uri="{FF2B5EF4-FFF2-40B4-BE49-F238E27FC236}">
+                <a16:creationId xmlns:a16="http://schemas.microsoft.com/office/drawing/2014/main" id="{ADE0712E-5FCC-748B-A50E-FCF8226877D8}"/>
+              </a:ext>
+            </a:extLst>
+          </p:cNvPr>
+          <p:cNvSpPr/>
+          <p:nvPr/>
+        </p:nvSpPr>
+        <p:spPr>
+          <a:xfrm>
+            <a:off x="9832169" y="2498467"/>
+            <a:ext cx="1634066" cy="474075"/>
+          </a:xfrm>
+          <a:prstGeom prst="rect">
+            <a:avLst/>
+          </a:prstGeom>
+          <a:solidFill>
+            <a:schemeClr val="tx2">
+              <a:lumMod val="75000"/>
+              <a:lumOff val="25000"/>
+            </a:schemeClr>
+          </a:solidFill>
+          <a:effectLst/>
+        </p:spPr>
+        <p:style>
+          <a:lnRef idx="2">
+            <a:schemeClr val="accent1">
+              <a:shade val="15000"/>
+            </a:schemeClr>
+          </a:lnRef>
+          <a:fillRef idx="1">
+            <a:schemeClr val="accent1"/>
+          </a:fillRef>
+          <a:effectRef idx="0">
+            <a:schemeClr val="accent1"/>
+          </a:effectRef>
+          <a:fontRef idx="minor">
+            <a:schemeClr val="lt1"/>
+          </a:fontRef>
+        </p:style>
+        <p:txBody>
+          <a:bodyPr rtlCol="0" anchor="ctr"/>
+          <a:lstStyle/>
+          <a:p>
+            <a:pPr algn="ctr"/>
+            <a:r>
+              <a:rPr lang="de-DE" sz="1200" b="1" dirty="0"/>
+              <a:t>Experiment Design</a:t>
+            </a:r>
+          </a:p>
+        </p:txBody>
+      </p:sp>
+      <p:sp>
+        <p:nvSpPr>
+          <p:cNvPr id="96" name="Rechteck 95">
+            <a:extLst>
+              <a:ext uri="{FF2B5EF4-FFF2-40B4-BE49-F238E27FC236}">
+                <a16:creationId xmlns:a16="http://schemas.microsoft.com/office/drawing/2014/main" id="{7D92B211-51CD-A297-591E-B978D5BE2148}"/>
+              </a:ext>
+            </a:extLst>
+          </p:cNvPr>
+          <p:cNvSpPr/>
+          <p:nvPr/>
+        </p:nvSpPr>
+        <p:spPr>
+          <a:xfrm>
+            <a:off x="9832168" y="3080608"/>
+            <a:ext cx="1634066" cy="474075"/>
+          </a:xfrm>
+          <a:prstGeom prst="rect">
+            <a:avLst/>
+          </a:prstGeom>
+          <a:solidFill>
+            <a:schemeClr val="tx2">
+              <a:lumMod val="75000"/>
+              <a:lumOff val="25000"/>
+            </a:schemeClr>
+          </a:solidFill>
+          <a:effectLst/>
+        </p:spPr>
+        <p:style>
+          <a:lnRef idx="2">
+            <a:schemeClr val="accent1">
+              <a:shade val="15000"/>
+            </a:schemeClr>
+          </a:lnRef>
+          <a:fillRef idx="1">
+            <a:schemeClr val="accent1"/>
+          </a:fillRef>
+          <a:effectRef idx="0">
+            <a:schemeClr val="accent1"/>
+          </a:effectRef>
+          <a:fontRef idx="minor">
+            <a:schemeClr val="lt1"/>
+          </a:fontRef>
+        </p:style>
+        <p:txBody>
+          <a:bodyPr rtlCol="0" anchor="ctr"/>
+          <a:lstStyle/>
+          <a:p>
+            <a:pPr algn="ctr"/>
+            <a:r>
+              <a:rPr lang="de-DE" sz="1200" b="1" dirty="0" err="1"/>
+              <a:t>Production</a:t>
+            </a:r>
+            <a:r>
+              <a:rPr lang="de-DE" sz="1200" b="1" dirty="0"/>
+              <a:t> Runs</a:t>
+            </a:r>
+          </a:p>
+        </p:txBody>
+      </p:sp>
+      <p:cxnSp>
+        <p:nvCxnSpPr>
+          <p:cNvPr id="3" name="Gerader Verbinder 2">
+            <a:extLst>
+              <a:ext uri="{FF2B5EF4-FFF2-40B4-BE49-F238E27FC236}">
+                <a16:creationId xmlns:a16="http://schemas.microsoft.com/office/drawing/2014/main" id="{7044D6C4-9C50-89B9-7824-7E147707C7C9}"/>
+              </a:ext>
+            </a:extLst>
+          </p:cNvPr>
+          <p:cNvCxnSpPr>
+            <a:cxnSpLocks/>
+          </p:cNvCxnSpPr>
+          <p:nvPr/>
+        </p:nvCxnSpPr>
+        <p:spPr>
+          <a:xfrm>
+            <a:off x="7223760" y="194733"/>
+            <a:ext cx="0" cy="6468534"/>
+          </a:xfrm>
+          <a:prstGeom prst="line">
+            <a:avLst/>
+          </a:prstGeom>
+          <a:ln w="57150">
+            <a:solidFill>
+              <a:srgbClr val="C00000"/>
+            </a:solidFill>
+            <a:prstDash val="sysDash"/>
+          </a:ln>
+        </p:spPr>
+        <p:style>
+          <a:lnRef idx="2">
+            <a:schemeClr val="accent1"/>
+          </a:lnRef>
+          <a:fillRef idx="0">
+            <a:schemeClr val="accent1"/>
+          </a:fillRef>
+          <a:effectRef idx="1">
+            <a:schemeClr val="accent1"/>
+          </a:effectRef>
+          <a:fontRef idx="minor">
+            <a:schemeClr val="tx1"/>
+          </a:fontRef>
+        </p:style>
+      </p:cxnSp>
+      <p:sp>
+        <p:nvSpPr>
+          <p:cNvPr id="67" name="Rechteck 66">
+            <a:extLst>
+              <a:ext uri="{FF2B5EF4-FFF2-40B4-BE49-F238E27FC236}">
+                <a16:creationId xmlns:a16="http://schemas.microsoft.com/office/drawing/2014/main" id="{53301DB8-B458-EBAE-AFCF-2CB63D0547F8}"/>
+              </a:ext>
+            </a:extLst>
+          </p:cNvPr>
+          <p:cNvSpPr/>
+          <p:nvPr/>
+        </p:nvSpPr>
+        <p:spPr>
+          <a:xfrm>
+            <a:off x="9832168" y="3660291"/>
+            <a:ext cx="1634066" cy="474075"/>
+          </a:xfrm>
+          <a:prstGeom prst="rect">
+            <a:avLst/>
+          </a:prstGeom>
+          <a:solidFill>
+            <a:srgbClr val="C00000"/>
+          </a:solidFill>
+          <a:effectLst/>
+        </p:spPr>
+        <p:style>
+          <a:lnRef idx="2">
+            <a:schemeClr val="accent1">
+              <a:shade val="15000"/>
+            </a:schemeClr>
+          </a:lnRef>
+          <a:fillRef idx="1">
+            <a:schemeClr val="accent1"/>
+          </a:fillRef>
+          <a:effectRef idx="0">
+            <a:schemeClr val="accent1"/>
+          </a:effectRef>
+          <a:fontRef idx="minor">
+            <a:schemeClr val="lt1"/>
+          </a:fontRef>
+        </p:style>
+        <p:txBody>
+          <a:bodyPr rtlCol="0" anchor="ctr"/>
+          <a:lstStyle/>
+          <a:p>
+            <a:pPr algn="ctr"/>
+            <a:r>
+              <a:rPr lang="de-DE" sz="1200" b="1" dirty="0" err="1"/>
+              <a:t>Presentation</a:t>
+            </a:r>
+            <a:r>
+              <a:rPr lang="de-DE" sz="1200" b="1" dirty="0"/>
+              <a:t> II</a:t>
+            </a:r>
+          </a:p>
+        </p:txBody>
+      </p:sp>
+      <p:sp>
+        <p:nvSpPr>
+          <p:cNvPr id="70" name="Rechteck 69">
+            <a:extLst>
+              <a:ext uri="{FF2B5EF4-FFF2-40B4-BE49-F238E27FC236}">
+                <a16:creationId xmlns:a16="http://schemas.microsoft.com/office/drawing/2014/main" id="{E31D0468-FCB4-826D-D91C-4C6F1600583D}"/>
+              </a:ext>
+            </a:extLst>
+          </p:cNvPr>
+          <p:cNvSpPr/>
+          <p:nvPr/>
+        </p:nvSpPr>
+        <p:spPr>
+          <a:xfrm>
+            <a:off x="9832168" y="4239974"/>
+            <a:ext cx="1634066" cy="474075"/>
+          </a:xfrm>
+          <a:prstGeom prst="rect">
+            <a:avLst/>
+          </a:prstGeom>
+          <a:solidFill>
+            <a:schemeClr val="tx2">
+              <a:lumMod val="75000"/>
+              <a:lumOff val="25000"/>
+            </a:schemeClr>
+          </a:solidFill>
+          <a:effectLst/>
+        </p:spPr>
+        <p:style>
+          <a:lnRef idx="2">
+            <a:schemeClr val="accent1">
+              <a:shade val="15000"/>
+            </a:schemeClr>
+          </a:lnRef>
+          <a:fillRef idx="1">
+            <a:schemeClr val="accent1"/>
+          </a:fillRef>
+          <a:effectRef idx="0">
+            <a:schemeClr val="accent1"/>
+          </a:effectRef>
+          <a:fontRef idx="minor">
+            <a:schemeClr val="lt1"/>
+          </a:fontRef>
+        </p:style>
+        <p:txBody>
+          <a:bodyPr rtlCol="0" anchor="ctr"/>
+          <a:lstStyle/>
+          <a:p>
+            <a:pPr algn="ctr"/>
+            <a:r>
+              <a:rPr lang="de-DE" sz="1200" b="1" dirty="0"/>
+              <a:t>Output Analysis</a:t>
+            </a:r>
+          </a:p>
+        </p:txBody>
+      </p:sp>
+      <p:sp>
+        <p:nvSpPr>
+          <p:cNvPr id="71" name="Rechteck 70">
+            <a:extLst>
+              <a:ext uri="{FF2B5EF4-FFF2-40B4-BE49-F238E27FC236}">
+                <a16:creationId xmlns:a16="http://schemas.microsoft.com/office/drawing/2014/main" id="{4D9815CE-C871-3255-4585-4D25D34289A2}"/>
+              </a:ext>
+            </a:extLst>
+          </p:cNvPr>
+          <p:cNvSpPr/>
+          <p:nvPr/>
+        </p:nvSpPr>
+        <p:spPr>
+          <a:xfrm>
+            <a:off x="9832168" y="4820327"/>
+            <a:ext cx="1634066" cy="474075"/>
+          </a:xfrm>
+          <a:prstGeom prst="rect">
+            <a:avLst/>
+          </a:prstGeom>
+          <a:solidFill>
+            <a:srgbClr val="C00000"/>
+          </a:solidFill>
+          <a:effectLst/>
+        </p:spPr>
+        <p:style>
+          <a:lnRef idx="2">
+            <a:schemeClr val="accent1">
+              <a:shade val="15000"/>
+            </a:schemeClr>
+          </a:lnRef>
+          <a:fillRef idx="1">
+            <a:schemeClr val="accent1"/>
+          </a:fillRef>
+          <a:effectRef idx="0">
+            <a:schemeClr val="accent1"/>
+          </a:effectRef>
+          <a:fontRef idx="minor">
+            <a:schemeClr val="lt1"/>
+          </a:fontRef>
+        </p:style>
+        <p:txBody>
+          <a:bodyPr rtlCol="0" anchor="ctr"/>
+          <a:lstStyle/>
+          <a:p>
+            <a:pPr algn="ctr"/>
+            <a:r>
+              <a:rPr lang="de-DE" sz="1200" b="1" dirty="0"/>
+              <a:t>Final </a:t>
+            </a:r>
+            <a:r>
+              <a:rPr lang="de-DE" sz="1200" b="1" dirty="0" err="1"/>
+              <a:t>Presenation</a:t>
+            </a:r>
+            <a:endParaRPr lang="de-DE" sz="1200" b="1" dirty="0"/>
+          </a:p>
+        </p:txBody>
+      </p:sp>
+      <p:sp>
+        <p:nvSpPr>
+          <p:cNvPr id="97" name="Rechteck 96">
+            <a:extLst>
+              <a:ext uri="{FF2B5EF4-FFF2-40B4-BE49-F238E27FC236}">
+                <a16:creationId xmlns:a16="http://schemas.microsoft.com/office/drawing/2014/main" id="{B0F42324-A718-BB98-08B8-B837026D0C8B}"/>
+              </a:ext>
+            </a:extLst>
+          </p:cNvPr>
+          <p:cNvSpPr/>
+          <p:nvPr/>
+        </p:nvSpPr>
+        <p:spPr>
+          <a:xfrm>
+            <a:off x="9832168" y="5402672"/>
+            <a:ext cx="1634066" cy="474075"/>
+          </a:xfrm>
+          <a:prstGeom prst="rect">
+            <a:avLst/>
+          </a:prstGeom>
+          <a:solidFill>
+            <a:srgbClr val="C00000"/>
+          </a:solidFill>
+          <a:effectLst/>
+        </p:spPr>
+        <p:style>
+          <a:lnRef idx="2">
+            <a:schemeClr val="accent1">
+              <a:shade val="15000"/>
+            </a:schemeClr>
+          </a:lnRef>
+          <a:fillRef idx="1">
+            <a:schemeClr val="accent1"/>
+          </a:fillRef>
+          <a:effectRef idx="0">
+            <a:schemeClr val="accent1"/>
+          </a:effectRef>
+          <a:fontRef idx="minor">
+            <a:schemeClr val="lt1"/>
+          </a:fontRef>
+        </p:style>
+        <p:txBody>
+          <a:bodyPr rtlCol="0" anchor="ctr"/>
+          <a:lstStyle/>
+          <a:p>
+            <a:pPr algn="ctr"/>
+            <a:r>
+              <a:rPr lang="de-DE" sz="1200" b="1" dirty="0"/>
+              <a:t>Report Submission</a:t>
+            </a:r>
+          </a:p>
+        </p:txBody>
+      </p:sp>
+      <p:sp>
+        <p:nvSpPr>
+          <p:cNvPr id="113" name="Rechteck 112">
+            <a:extLst>
+              <a:ext uri="{FF2B5EF4-FFF2-40B4-BE49-F238E27FC236}">
+                <a16:creationId xmlns:a16="http://schemas.microsoft.com/office/drawing/2014/main" id="{33108DC3-7466-5268-BEFA-B1DE17EC4D5C}"/>
+              </a:ext>
+            </a:extLst>
+          </p:cNvPr>
+          <p:cNvSpPr/>
+          <p:nvPr/>
+        </p:nvSpPr>
+        <p:spPr>
+          <a:xfrm rot="5400000">
+            <a:off x="6627536" y="3377229"/>
+            <a:ext cx="1194225" cy="338027"/>
+          </a:xfrm>
+          <a:prstGeom prst="rect">
+            <a:avLst/>
+          </a:prstGeom>
+          <a:solidFill>
+            <a:srgbClr val="C00000"/>
+          </a:solidFill>
+          <a:effectLst/>
+        </p:spPr>
+        <p:style>
+          <a:lnRef idx="2">
+            <a:schemeClr val="accent1">
+              <a:shade val="15000"/>
+            </a:schemeClr>
+          </a:lnRef>
+          <a:fillRef idx="1">
+            <a:schemeClr val="accent1"/>
+          </a:fillRef>
+          <a:effectRef idx="0">
+            <a:schemeClr val="accent1"/>
+          </a:effectRef>
+          <a:fontRef idx="minor">
+            <a:schemeClr val="lt1"/>
+          </a:fontRef>
+        </p:style>
+        <p:txBody>
+          <a:bodyPr rtlCol="0" anchor="ctr"/>
+          <a:lstStyle/>
+          <a:p>
+            <a:pPr algn="ctr"/>
+            <a:r>
+              <a:rPr lang="de-DE" sz="1200" b="1" dirty="0" err="1"/>
+              <a:t>Presentation</a:t>
+            </a:r>
+            <a:r>
+              <a:rPr lang="de-DE" sz="1200" b="1" dirty="0"/>
+              <a:t> I</a:t>
+            </a:r>
+          </a:p>
+        </p:txBody>
+      </p:sp>
+      <p:sp>
+        <p:nvSpPr>
+          <p:cNvPr id="114" name="Rechteck 113">
+            <a:extLst>
+              <a:ext uri="{FF2B5EF4-FFF2-40B4-BE49-F238E27FC236}">
+                <a16:creationId xmlns:a16="http://schemas.microsoft.com/office/drawing/2014/main" id="{9DEA46DB-ABF3-8CE9-D40A-9C733C60A9E4}"/>
+              </a:ext>
+            </a:extLst>
+          </p:cNvPr>
+          <p:cNvSpPr/>
+          <p:nvPr/>
+        </p:nvSpPr>
+        <p:spPr>
+          <a:xfrm>
+            <a:off x="690710" y="686090"/>
+            <a:ext cx="1634067" cy="474075"/>
+          </a:xfrm>
+          <a:prstGeom prst="rect">
+            <a:avLst/>
+          </a:prstGeom>
+          <a:solidFill>
+            <a:schemeClr val="accent5"/>
+          </a:solidFill>
+          <a:effectLst/>
+        </p:spPr>
+        <p:style>
+          <a:lnRef idx="2">
+            <a:schemeClr val="accent1">
+              <a:shade val="15000"/>
+            </a:schemeClr>
+          </a:lnRef>
+          <a:fillRef idx="1">
+            <a:schemeClr val="accent1"/>
+          </a:fillRef>
+          <a:effectRef idx="0">
+            <a:schemeClr val="accent1"/>
+          </a:effectRef>
+          <a:fontRef idx="minor">
+            <a:schemeClr val="lt1"/>
+          </a:fontRef>
+        </p:style>
+        <p:txBody>
+          <a:bodyPr rtlCol="0" anchor="ctr"/>
+          <a:lstStyle/>
+          <a:p>
+            <a:pPr algn="ctr"/>
+            <a:r>
+              <a:rPr lang="de-DE" sz="1200" b="1" dirty="0"/>
+              <a:t>April 26th</a:t>
+            </a:r>
+          </a:p>
+        </p:txBody>
+      </p:sp>
+      <p:sp>
+        <p:nvSpPr>
+          <p:cNvPr id="68" name="Rechteck 67">
+            <a:extLst>
+              <a:ext uri="{FF2B5EF4-FFF2-40B4-BE49-F238E27FC236}">
+                <a16:creationId xmlns:a16="http://schemas.microsoft.com/office/drawing/2014/main" id="{26FACBD9-567C-1675-2360-F92A4DBE3427}"/>
+              </a:ext>
+            </a:extLst>
+          </p:cNvPr>
+          <p:cNvSpPr/>
+          <p:nvPr/>
+        </p:nvSpPr>
+        <p:spPr>
+          <a:xfrm>
+            <a:off x="690711" y="6109286"/>
+            <a:ext cx="10775524" cy="474075"/>
+          </a:xfrm>
+          <a:prstGeom prst="rect">
+            <a:avLst/>
+          </a:prstGeom>
+          <a:solidFill>
+            <a:schemeClr val="tx2">
+              <a:lumMod val="75000"/>
+              <a:lumOff val="25000"/>
+            </a:schemeClr>
+          </a:solidFill>
+          <a:effectLst/>
+        </p:spPr>
+        <p:style>
+          <a:lnRef idx="2">
+            <a:schemeClr val="accent1">
+              <a:shade val="15000"/>
+            </a:schemeClr>
+          </a:lnRef>
+          <a:fillRef idx="1">
+            <a:schemeClr val="accent1"/>
+          </a:fillRef>
+          <a:effectRef idx="0">
+            <a:schemeClr val="accent1"/>
+          </a:effectRef>
+          <a:fontRef idx="minor">
+            <a:schemeClr val="lt1"/>
+          </a:fontRef>
+        </p:style>
+        <p:txBody>
+          <a:bodyPr rtlCol="0" anchor="ctr"/>
+          <a:lstStyle/>
+          <a:p>
+            <a:pPr algn="ctr"/>
+            <a:r>
+              <a:rPr lang="de-DE" sz="1200" b="1" dirty="0" err="1"/>
+              <a:t>Documentation</a:t>
+            </a:r>
+            <a:r>
+              <a:rPr lang="de-DE" sz="1200" b="1" dirty="0"/>
+              <a:t>, </a:t>
+            </a:r>
+            <a:r>
+              <a:rPr lang="de-DE" sz="1200" b="1" dirty="0" err="1"/>
+              <a:t>Presentation</a:t>
+            </a:r>
+            <a:r>
+              <a:rPr lang="de-DE" sz="1200" b="1" dirty="0"/>
+              <a:t>, and Report</a:t>
+            </a:r>
+          </a:p>
+        </p:txBody>
+      </p:sp>
+      <p:sp>
+        <p:nvSpPr>
+          <p:cNvPr id="116" name="Rechteck 115">
+            <a:extLst>
+              <a:ext uri="{FF2B5EF4-FFF2-40B4-BE49-F238E27FC236}">
+                <a16:creationId xmlns:a16="http://schemas.microsoft.com/office/drawing/2014/main" id="{E22349BC-C642-70C9-5A83-5A7DB8DACE59}"/>
+              </a:ext>
+            </a:extLst>
+          </p:cNvPr>
+          <p:cNvSpPr/>
+          <p:nvPr/>
+        </p:nvSpPr>
+        <p:spPr>
+          <a:xfrm>
+            <a:off x="2972221" y="690015"/>
+            <a:ext cx="1634067" cy="474075"/>
+          </a:xfrm>
+          <a:prstGeom prst="rect">
+            <a:avLst/>
+          </a:prstGeom>
+          <a:solidFill>
+            <a:schemeClr val="accent5"/>
+          </a:solidFill>
+          <a:effectLst/>
+        </p:spPr>
+        <p:style>
+          <a:lnRef idx="2">
+            <a:schemeClr val="accent1">
+              <a:shade val="15000"/>
+            </a:schemeClr>
+          </a:lnRef>
+          <a:fillRef idx="1">
+            <a:schemeClr val="accent1"/>
+          </a:fillRef>
+          <a:effectRef idx="0">
+            <a:schemeClr val="accent1"/>
+          </a:effectRef>
+          <a:fontRef idx="minor">
+            <a:schemeClr val="lt1"/>
+          </a:fontRef>
+        </p:style>
+        <p:txBody>
+          <a:bodyPr rtlCol="0" anchor="ctr"/>
+          <a:lstStyle/>
+          <a:p>
+            <a:pPr algn="ctr"/>
+            <a:r>
+              <a:rPr lang="de-DE" sz="1200" b="1" dirty="0"/>
+              <a:t>May 6th</a:t>
+            </a:r>
+          </a:p>
+        </p:txBody>
+      </p:sp>
+      <p:sp>
+        <p:nvSpPr>
+          <p:cNvPr id="117" name="Rechteck 116">
+            <a:extLst>
+              <a:ext uri="{FF2B5EF4-FFF2-40B4-BE49-F238E27FC236}">
+                <a16:creationId xmlns:a16="http://schemas.microsoft.com/office/drawing/2014/main" id="{0CD50A5B-9B94-34E5-E444-4AE50DA24CA0}"/>
+              </a:ext>
+            </a:extLst>
+          </p:cNvPr>
+          <p:cNvSpPr/>
+          <p:nvPr/>
+        </p:nvSpPr>
+        <p:spPr>
+          <a:xfrm>
+            <a:off x="5261440" y="686089"/>
+            <a:ext cx="1634067" cy="474075"/>
+          </a:xfrm>
+          <a:prstGeom prst="rect">
+            <a:avLst/>
+          </a:prstGeom>
+          <a:solidFill>
+            <a:schemeClr val="accent5"/>
+          </a:solidFill>
+          <a:effectLst/>
+        </p:spPr>
+        <p:style>
+          <a:lnRef idx="2">
+            <a:schemeClr val="accent1">
+              <a:shade val="15000"/>
+            </a:schemeClr>
+          </a:lnRef>
+          <a:fillRef idx="1">
+            <a:schemeClr val="accent1"/>
+          </a:fillRef>
+          <a:effectRef idx="0">
+            <a:schemeClr val="accent1"/>
+          </a:effectRef>
+          <a:fontRef idx="minor">
+            <a:schemeClr val="lt1"/>
+          </a:fontRef>
+        </p:style>
+        <p:txBody>
+          <a:bodyPr rtlCol="0" anchor="ctr"/>
+          <a:lstStyle/>
+          <a:p>
+            <a:pPr algn="ctr"/>
+            <a:r>
+              <a:rPr lang="de-DE" sz="1200" b="1" dirty="0"/>
+              <a:t>May 7th</a:t>
+            </a:r>
+          </a:p>
+        </p:txBody>
+      </p:sp>
+      <p:sp>
+        <p:nvSpPr>
+          <p:cNvPr id="118" name="Rechteck 117">
+            <a:extLst>
+              <a:ext uri="{FF2B5EF4-FFF2-40B4-BE49-F238E27FC236}">
+                <a16:creationId xmlns:a16="http://schemas.microsoft.com/office/drawing/2014/main" id="{84A85040-1CD3-9FB6-EA9E-73258CD0C1A6}"/>
+              </a:ext>
+            </a:extLst>
+          </p:cNvPr>
+          <p:cNvSpPr/>
+          <p:nvPr/>
+        </p:nvSpPr>
+        <p:spPr>
+          <a:xfrm>
+            <a:off x="7546340" y="681289"/>
+            <a:ext cx="1634067" cy="474075"/>
+          </a:xfrm>
+          <a:prstGeom prst="rect">
+            <a:avLst/>
+          </a:prstGeom>
+          <a:solidFill>
+            <a:schemeClr val="accent5"/>
+          </a:solidFill>
+          <a:effectLst/>
+        </p:spPr>
+        <p:style>
+          <a:lnRef idx="2">
+            <a:schemeClr val="accent1">
+              <a:shade val="15000"/>
+            </a:schemeClr>
+          </a:lnRef>
+          <a:fillRef idx="1">
+            <a:schemeClr val="accent1"/>
+          </a:fillRef>
+          <a:effectRef idx="0">
+            <a:schemeClr val="accent1"/>
+          </a:effectRef>
+          <a:fontRef idx="minor">
+            <a:schemeClr val="lt1"/>
+          </a:fontRef>
+        </p:style>
+        <p:txBody>
+          <a:bodyPr rtlCol="0" anchor="ctr"/>
+          <a:lstStyle/>
+          <a:p>
+            <a:pPr algn="ctr"/>
+            <a:r>
+              <a:rPr lang="de-DE" sz="1200" b="1" dirty="0"/>
+              <a:t>June 4th</a:t>
+            </a:r>
+          </a:p>
+        </p:txBody>
+      </p:sp>
+      <p:sp>
+        <p:nvSpPr>
+          <p:cNvPr id="119" name="Rechteck 118">
+            <a:extLst>
+              <a:ext uri="{FF2B5EF4-FFF2-40B4-BE49-F238E27FC236}">
+                <a16:creationId xmlns:a16="http://schemas.microsoft.com/office/drawing/2014/main" id="{CDF4E2D7-DFF8-D73E-12E5-6ED4930C902F}"/>
+              </a:ext>
+            </a:extLst>
+          </p:cNvPr>
+          <p:cNvSpPr/>
+          <p:nvPr/>
+        </p:nvSpPr>
+        <p:spPr>
+          <a:xfrm>
+            <a:off x="9832168" y="681289"/>
+            <a:ext cx="1634067" cy="474075"/>
+          </a:xfrm>
+          <a:prstGeom prst="rect">
+            <a:avLst/>
+          </a:prstGeom>
+          <a:solidFill>
+            <a:schemeClr val="accent5"/>
+          </a:solidFill>
+          <a:effectLst/>
+        </p:spPr>
+        <p:style>
+          <a:lnRef idx="2">
+            <a:schemeClr val="accent1">
+              <a:shade val="15000"/>
+            </a:schemeClr>
+          </a:lnRef>
+          <a:fillRef idx="1">
+            <a:schemeClr val="accent1"/>
+          </a:fillRef>
+          <a:effectRef idx="0">
+            <a:schemeClr val="accent1"/>
+          </a:effectRef>
+          <a:fontRef idx="minor">
+            <a:schemeClr val="lt1"/>
+          </a:fontRef>
+        </p:style>
+        <p:txBody>
+          <a:bodyPr rtlCol="0" anchor="ctr"/>
+          <a:lstStyle/>
+          <a:p>
+            <a:pPr algn="ctr"/>
+            <a:r>
+              <a:rPr lang="de-DE" sz="1200" b="1" dirty="0" err="1"/>
+              <a:t>July</a:t>
+            </a:r>
+            <a:r>
+              <a:rPr lang="de-DE" sz="1200" b="1" dirty="0"/>
+              <a:t> 16th</a:t>
+            </a:r>
+          </a:p>
+        </p:txBody>
+      </p:sp>
+      <p:cxnSp>
+        <p:nvCxnSpPr>
+          <p:cNvPr id="2" name="Gerader Verbinder 1">
+            <a:extLst>
+              <a:ext uri="{FF2B5EF4-FFF2-40B4-BE49-F238E27FC236}">
+                <a16:creationId xmlns:a16="http://schemas.microsoft.com/office/drawing/2014/main" id="{C4413227-EA86-B93B-BB75-708003555A61}"/>
+              </a:ext>
+            </a:extLst>
+          </p:cNvPr>
+          <p:cNvCxnSpPr>
+            <a:cxnSpLocks/>
+          </p:cNvCxnSpPr>
+          <p:nvPr/>
+        </p:nvCxnSpPr>
+        <p:spPr>
+          <a:xfrm flipV="1">
+            <a:off x="9453160" y="2418259"/>
+            <a:ext cx="2345310" cy="22029"/>
+          </a:xfrm>
+          <a:prstGeom prst="line">
+            <a:avLst/>
+          </a:prstGeom>
+          <a:ln w="57150">
+            <a:solidFill>
+              <a:srgbClr val="FFC000"/>
+            </a:solidFill>
+            <a:prstDash val="sysDash"/>
+          </a:ln>
+        </p:spPr>
+        <p:style>
+          <a:lnRef idx="2">
+            <a:schemeClr val="accent1"/>
+          </a:lnRef>
+          <a:fillRef idx="0">
+            <a:schemeClr val="accent1"/>
+          </a:fillRef>
+          <a:effectRef idx="1">
+            <a:schemeClr val="accent1"/>
+          </a:effectRef>
+          <a:fontRef idx="minor">
+            <a:schemeClr val="tx1"/>
+          </a:fontRef>
+        </p:style>
+      </p:cxnSp>
+      <p:sp>
+        <p:nvSpPr>
+          <p:cNvPr id="7" name="Rechteck 6">
+            <a:extLst>
+              <a:ext uri="{FF2B5EF4-FFF2-40B4-BE49-F238E27FC236}">
+                <a16:creationId xmlns:a16="http://schemas.microsoft.com/office/drawing/2014/main" id="{755E3F18-3E6A-B27A-6AFA-601781DD574D}"/>
+              </a:ext>
+            </a:extLst>
+          </p:cNvPr>
+          <p:cNvSpPr/>
+          <p:nvPr/>
+        </p:nvSpPr>
+        <p:spPr>
+          <a:xfrm>
+            <a:off x="10904175" y="2257712"/>
+            <a:ext cx="1194225" cy="338027"/>
+          </a:xfrm>
+          <a:prstGeom prst="rect">
+            <a:avLst/>
+          </a:prstGeom>
+          <a:solidFill>
+            <a:srgbClr val="FFC000"/>
+          </a:solidFill>
+          <a:ln>
+            <a:solidFill>
+              <a:schemeClr val="tx1"/>
+            </a:solidFill>
+          </a:ln>
+          <a:effectLst/>
+        </p:spPr>
+        <p:style>
+          <a:lnRef idx="2">
+            <a:schemeClr val="accent1">
+              <a:shade val="15000"/>
+            </a:schemeClr>
+          </a:lnRef>
+          <a:fillRef idx="1">
+            <a:schemeClr val="accent1"/>
+          </a:fillRef>
+          <a:effectRef idx="0">
+            <a:schemeClr val="accent1"/>
+          </a:effectRef>
+          <a:fontRef idx="minor">
+            <a:schemeClr val="lt1"/>
+          </a:fontRef>
+        </p:style>
+        <p:txBody>
+          <a:bodyPr rtlCol="0" anchor="ctr"/>
+          <a:lstStyle/>
+          <a:p>
+            <a:pPr algn="ctr"/>
+            <a:r>
+              <a:rPr lang="de-DE" sz="1200" b="1" dirty="0" err="1">
+                <a:solidFill>
+                  <a:schemeClr val="tx1"/>
+                </a:solidFill>
+              </a:rPr>
+              <a:t>Presentation</a:t>
+            </a:r>
+            <a:r>
+              <a:rPr lang="de-DE" sz="1200" b="1" dirty="0">
+                <a:solidFill>
+                  <a:schemeClr val="tx1"/>
+                </a:solidFill>
+              </a:rPr>
+              <a:t> II</a:t>
+            </a:r>
+          </a:p>
+        </p:txBody>
+      </p:sp>
+    </p:spTree>
+    <p:extLst>
+      <p:ext uri="{BB962C8B-B14F-4D97-AF65-F5344CB8AC3E}">
+        <p14:creationId xmlns:p14="http://schemas.microsoft.com/office/powerpoint/2010/main" val="1999979771"/>
+      </p:ext>
+    </p:extLst>
+  </p:cSld>
+  <p:clrMapOvr>
+    <a:masterClrMapping/>
+  </p:clrMapOvr>
+</p:sld>
+</file>
+
+<file path=ppt/slides/slide2.xml><?xml version="1.0" encoding="utf-8"?>
 <p:sld xmlns:a="http://schemas.openxmlformats.org/drawingml/2006/main" xmlns:r="http://schemas.openxmlformats.org/officeDocument/2006/relationships" xmlns:p="http://schemas.openxmlformats.org/presentationml/2006/main">
   <p:cSld>
     <p:spTree>
@@ -7448,7 +11711,7 @@
 </p:sld>
 </file>
 
-<file path=ppt/slides/slide2.xml><?xml version="1.0" encoding="utf-8"?>
+<file path=ppt/slides/slide3.xml><?xml version="1.0" encoding="utf-8"?>
 <p:sld xmlns:a="http://schemas.openxmlformats.org/drawingml/2006/main" xmlns:r="http://schemas.openxmlformats.org/officeDocument/2006/relationships" xmlns:p="http://schemas.openxmlformats.org/presentationml/2006/main" show="0">
   <p:cSld>
     <p:spTree>
